--- a/Presentazione Progetto Database Multimodello.pptx
+++ b/Presentazione Progetto Database Multimodello.pptx
@@ -154,13 +154,28 @@
 <pc:chgInfo xmlns:a="http://schemas.openxmlformats.org/drawingml/2006/main" xmlns:r="http://schemas.openxmlformats.org/officeDocument/2006/relationships" xmlns:ac="http://schemas.microsoft.com/office/drawing/2013/main/command" xmlns:pc="http://schemas.microsoft.com/office/powerpoint/2013/main/command">
   <pc:docChgLst>
     <pc:chgData name="De Giorgi, Giuseppe" userId="2bed3bf2-41f1-45b4-a919-c57b18870117" providerId="ADAL" clId="{EB3AAB68-1C81-4FAA-9471-49551CB4A501}"/>
-    <pc:docChg chg="undo custSel addSld delSld modSld sldOrd">
-      <pc:chgData name="De Giorgi, Giuseppe" userId="2bed3bf2-41f1-45b4-a919-c57b18870117" providerId="ADAL" clId="{EB3AAB68-1C81-4FAA-9471-49551CB4A501}" dt="2026-06-26T08:23:30.073" v="333" actId="26606"/>
+    <pc:docChg chg="undo custSel addSld delSld modSld sldOrd addMainMaster delMainMaster modMainMaster">
+      <pc:chgData name="De Giorgi, Giuseppe" userId="2bed3bf2-41f1-45b4-a919-c57b18870117" providerId="ADAL" clId="{EB3AAB68-1C81-4FAA-9471-49551CB4A501}" dt="2026-06-26T08:40:48.007" v="345" actId="26606"/>
       <pc:docMkLst>
         <pc:docMk/>
       </pc:docMkLst>
+      <pc:sldChg chg="addSp mod">
+        <pc:chgData name="De Giorgi, Giuseppe" userId="2bed3bf2-41f1-45b4-a919-c57b18870117" providerId="ADAL" clId="{EB3AAB68-1C81-4FAA-9471-49551CB4A501}" dt="2026-06-26T08:40:48.007" v="345" actId="26606"/>
+        <pc:sldMkLst>
+          <pc:docMk/>
+          <pc:sldMk cId="4043737824" sldId="257"/>
+        </pc:sldMkLst>
+        <pc:spChg chg="add">
+          <ac:chgData name="De Giorgi, Giuseppe" userId="2bed3bf2-41f1-45b4-a919-c57b18870117" providerId="ADAL" clId="{EB3AAB68-1C81-4FAA-9471-49551CB4A501}" dt="2026-06-26T08:40:48.007" v="345" actId="26606"/>
+          <ac:spMkLst>
+            <pc:docMk/>
+            <pc:sldMk cId="4043737824" sldId="257"/>
+            <ac:spMk id="9001" creationId="{00000000-0000-0000-0000-000000000000}"/>
+          </ac:spMkLst>
+        </pc:spChg>
+      </pc:sldChg>
       <pc:sldChg chg="addSp delSp modSp mod">
-        <pc:chgData name="De Giorgi, Giuseppe" userId="2bed3bf2-41f1-45b4-a919-c57b18870117" providerId="ADAL" clId="{EB3AAB68-1C81-4FAA-9471-49551CB4A501}" dt="2026-06-26T08:23:30.073" v="333" actId="26606"/>
+        <pc:chgData name="De Giorgi, Giuseppe" userId="2bed3bf2-41f1-45b4-a919-c57b18870117" providerId="ADAL" clId="{EB3AAB68-1C81-4FAA-9471-49551CB4A501}" dt="2026-06-26T08:40:48.007" v="345" actId="26606"/>
         <pc:sldMkLst>
           <pc:docMk/>
           <pc:sldMk cId="191714609" sldId="258"/>
@@ -197,9 +212,63 @@
             <ac:spMk id="7" creationId="{D367E0BF-3DFE-2ADC-BFEC-83F548DFE096}"/>
           </ac:spMkLst>
         </pc:spChg>
+        <pc:spChg chg="add">
+          <ac:chgData name="De Giorgi, Giuseppe" userId="2bed3bf2-41f1-45b4-a919-c57b18870117" providerId="ADAL" clId="{EB3AAB68-1C81-4FAA-9471-49551CB4A501}" dt="2026-06-26T08:40:48.007" v="345" actId="26606"/>
+          <ac:spMkLst>
+            <pc:docMk/>
+            <pc:sldMk cId="191714609" sldId="258"/>
+            <ac:spMk id="9001" creationId="{00000000-0000-0000-0000-000000000000}"/>
+          </ac:spMkLst>
+        </pc:spChg>
       </pc:sldChg>
-      <pc:sldChg chg="modSp mod">
-        <pc:chgData name="De Giorgi, Giuseppe" userId="2bed3bf2-41f1-45b4-a919-c57b18870117" providerId="ADAL" clId="{EB3AAB68-1C81-4FAA-9471-49551CB4A501}" dt="2026-06-25T08:18:29.277" v="0" actId="26606"/>
+      <pc:sldChg chg="addSp delSp mod">
+        <pc:chgData name="De Giorgi, Giuseppe" userId="2bed3bf2-41f1-45b4-a919-c57b18870117" providerId="ADAL" clId="{EB3AAB68-1C81-4FAA-9471-49551CB4A501}" dt="2026-06-26T08:40:48.007" v="345" actId="26606"/>
+        <pc:sldMkLst>
+          <pc:docMk/>
+          <pc:sldMk cId="3128798429" sldId="259"/>
+        </pc:sldMkLst>
+        <pc:spChg chg="del">
+          <ac:chgData name="De Giorgi, Giuseppe" userId="2bed3bf2-41f1-45b4-a919-c57b18870117" providerId="ADAL" clId="{EB3AAB68-1C81-4FAA-9471-49551CB4A501}" dt="2026-06-26T08:40:48.007" v="345" actId="26606"/>
+          <ac:spMkLst>
+            <pc:docMk/>
+            <pc:sldMk cId="3128798429" sldId="259"/>
+            <ac:spMk id="4" creationId="{DCC9EBD1-C824-9E55-76C3-3CF415962A6D}"/>
+          </ac:spMkLst>
+        </pc:spChg>
+        <pc:spChg chg="add">
+          <ac:chgData name="De Giorgi, Giuseppe" userId="2bed3bf2-41f1-45b4-a919-c57b18870117" providerId="ADAL" clId="{EB3AAB68-1C81-4FAA-9471-49551CB4A501}" dt="2026-06-26T08:40:48.007" v="345" actId="26606"/>
+          <ac:spMkLst>
+            <pc:docMk/>
+            <pc:sldMk cId="3128798429" sldId="259"/>
+            <ac:spMk id="9001" creationId="{00000000-0000-0000-0000-000000000000}"/>
+          </ac:spMkLst>
+        </pc:spChg>
+      </pc:sldChg>
+      <pc:sldChg chg="addSp delSp mod">
+        <pc:chgData name="De Giorgi, Giuseppe" userId="2bed3bf2-41f1-45b4-a919-c57b18870117" providerId="ADAL" clId="{EB3AAB68-1C81-4FAA-9471-49551CB4A501}" dt="2026-06-26T08:40:48.007" v="345" actId="26606"/>
+        <pc:sldMkLst>
+          <pc:docMk/>
+          <pc:sldMk cId="4215556392" sldId="260"/>
+        </pc:sldMkLst>
+        <pc:spChg chg="del">
+          <ac:chgData name="De Giorgi, Giuseppe" userId="2bed3bf2-41f1-45b4-a919-c57b18870117" providerId="ADAL" clId="{EB3AAB68-1C81-4FAA-9471-49551CB4A501}" dt="2026-06-26T08:40:48.007" v="345" actId="26606"/>
+          <ac:spMkLst>
+            <pc:docMk/>
+            <pc:sldMk cId="4215556392" sldId="260"/>
+            <ac:spMk id="4" creationId="{442F80AC-F994-FCA6-F3E5-539FB789E8E8}"/>
+          </ac:spMkLst>
+        </pc:spChg>
+        <pc:spChg chg="add">
+          <ac:chgData name="De Giorgi, Giuseppe" userId="2bed3bf2-41f1-45b4-a919-c57b18870117" providerId="ADAL" clId="{EB3AAB68-1C81-4FAA-9471-49551CB4A501}" dt="2026-06-26T08:40:48.007" v="345" actId="26606"/>
+          <ac:spMkLst>
+            <pc:docMk/>
+            <pc:sldMk cId="4215556392" sldId="260"/>
+            <ac:spMk id="9001" creationId="{00000000-0000-0000-0000-000000000000}"/>
+          </ac:spMkLst>
+        </pc:spChg>
+      </pc:sldChg>
+      <pc:sldChg chg="addSp modSp mod">
+        <pc:chgData name="De Giorgi, Giuseppe" userId="2bed3bf2-41f1-45b4-a919-c57b18870117" providerId="ADAL" clId="{EB3AAB68-1C81-4FAA-9471-49551CB4A501}" dt="2026-06-26T08:40:48.007" v="345" actId="26606"/>
         <pc:sldMkLst>
           <pc:docMk/>
           <pc:sldMk cId="1426572135" sldId="261"/>
@@ -220,16 +289,40 @@
             <ac:spMk id="13" creationId="{C7A67D18-C3AD-43E7-7787-43FBAF3D444F}"/>
           </ac:spMkLst>
         </pc:spChg>
+        <pc:spChg chg="add">
+          <ac:chgData name="De Giorgi, Giuseppe" userId="2bed3bf2-41f1-45b4-a919-c57b18870117" providerId="ADAL" clId="{EB3AAB68-1C81-4FAA-9471-49551CB4A501}" dt="2026-06-26T08:40:48.007" v="345" actId="26606"/>
+          <ac:spMkLst>
+            <pc:docMk/>
+            <pc:sldMk cId="1426572135" sldId="261"/>
+            <ac:spMk id="9001" creationId="{00000000-0000-0000-0000-000000000000}"/>
+          </ac:spMkLst>
+        </pc:spChg>
       </pc:sldChg>
-      <pc:sldChg chg="add">
-        <pc:chgData name="De Giorgi, Giuseppe" userId="2bed3bf2-41f1-45b4-a919-c57b18870117" providerId="ADAL" clId="{EB3AAB68-1C81-4FAA-9471-49551CB4A501}" dt="2026-06-25T08:30:46.889" v="1" actId="26606"/>
+      <pc:sldChg chg="addSp delSp add mod">
+        <pc:chgData name="De Giorgi, Giuseppe" userId="2bed3bf2-41f1-45b4-a919-c57b18870117" providerId="ADAL" clId="{EB3AAB68-1C81-4FAA-9471-49551CB4A501}" dt="2026-06-26T08:40:48.007" v="345" actId="26606"/>
         <pc:sldMkLst>
           <pc:docMk/>
           <pc:sldMk cId="4215556393" sldId="262"/>
         </pc:sldMkLst>
+        <pc:spChg chg="del">
+          <ac:chgData name="De Giorgi, Giuseppe" userId="2bed3bf2-41f1-45b4-a919-c57b18870117" providerId="ADAL" clId="{EB3AAB68-1C81-4FAA-9471-49551CB4A501}" dt="2026-06-26T08:40:48.007" v="345" actId="26606"/>
+          <ac:spMkLst>
+            <pc:docMk/>
+            <pc:sldMk cId="4215556393" sldId="262"/>
+            <ac:spMk id="4" creationId="{442F80AC-F994-FCA6-F3E5-539FB789E8E8}"/>
+          </ac:spMkLst>
+        </pc:spChg>
+        <pc:spChg chg="add">
+          <ac:chgData name="De Giorgi, Giuseppe" userId="2bed3bf2-41f1-45b4-a919-c57b18870117" providerId="ADAL" clId="{EB3AAB68-1C81-4FAA-9471-49551CB4A501}" dt="2026-06-26T08:40:48.007" v="345" actId="26606"/>
+          <ac:spMkLst>
+            <pc:docMk/>
+            <pc:sldMk cId="4215556393" sldId="262"/>
+            <ac:spMk id="9001" creationId="{00000000-0000-0000-0000-000000000000}"/>
+          </ac:spMkLst>
+        </pc:spChg>
       </pc:sldChg>
       <pc:sldChg chg="addSp delSp modSp new mod modClrScheme chgLayout">
-        <pc:chgData name="De Giorgi, Giuseppe" userId="2bed3bf2-41f1-45b4-a919-c57b18870117" providerId="ADAL" clId="{EB3AAB68-1C81-4FAA-9471-49551CB4A501}" dt="2026-06-25T08:52:07.698" v="20" actId="478"/>
+        <pc:chgData name="De Giorgi, Giuseppe" userId="2bed3bf2-41f1-45b4-a919-c57b18870117" providerId="ADAL" clId="{EB3AAB68-1C81-4FAA-9471-49551CB4A501}" dt="2026-06-26T08:40:48.007" v="345" actId="26606"/>
         <pc:sldMkLst>
           <pc:docMk/>
           <pc:sldMk cId="408029411" sldId="263"/>
@@ -304,6 +397,14 @@
             <pc:docMk/>
             <pc:sldMk cId="408029411" sldId="263"/>
             <ac:spMk id="13" creationId="{A08D6311-9009-1BAA-0C1A-1A7F9C6A1ED0}"/>
+          </ac:spMkLst>
+        </pc:spChg>
+        <pc:spChg chg="add">
+          <ac:chgData name="De Giorgi, Giuseppe" userId="2bed3bf2-41f1-45b4-a919-c57b18870117" providerId="ADAL" clId="{EB3AAB68-1C81-4FAA-9471-49551CB4A501}" dt="2026-06-26T08:40:48.007" v="345" actId="26606"/>
+          <ac:spMkLst>
+            <pc:docMk/>
+            <pc:sldMk cId="408029411" sldId="263"/>
+            <ac:spMk id="9001" creationId="{00000000-0000-0000-0000-000000000000}"/>
           </ac:spMkLst>
         </pc:spChg>
         <pc:picChg chg="add mod ord">
@@ -323,7 +424,7 @@
         </pc:sldMkLst>
       </pc:sldChg>
       <pc:sldChg chg="addSp delSp modSp new mod">
-        <pc:chgData name="De Giorgi, Giuseppe" userId="2bed3bf2-41f1-45b4-a919-c57b18870117" providerId="ADAL" clId="{EB3AAB68-1C81-4FAA-9471-49551CB4A501}" dt="2026-06-25T11:21:10.601" v="48" actId="478"/>
+        <pc:chgData name="De Giorgi, Giuseppe" userId="2bed3bf2-41f1-45b4-a919-c57b18870117" providerId="ADAL" clId="{EB3AAB68-1C81-4FAA-9471-49551CB4A501}" dt="2026-06-26T08:40:48.007" v="345" actId="26606"/>
         <pc:sldMkLst>
           <pc:docMk/>
           <pc:sldMk cId="3551089479" sldId="264"/>
@@ -384,6 +485,14 @@
             <ac:spMk id="23" creationId="{00000000-0000-0000-0000-000000000000}"/>
           </ac:spMkLst>
         </pc:spChg>
+        <pc:spChg chg="add">
+          <ac:chgData name="De Giorgi, Giuseppe" userId="2bed3bf2-41f1-45b4-a919-c57b18870117" providerId="ADAL" clId="{EB3AAB68-1C81-4FAA-9471-49551CB4A501}" dt="2026-06-26T08:40:48.007" v="345" actId="26606"/>
+          <ac:spMkLst>
+            <pc:docMk/>
+            <pc:sldMk cId="3551089479" sldId="264"/>
+            <ac:spMk id="9001" creationId="{00000000-0000-0000-0000-000000000000}"/>
+          </ac:spMkLst>
+        </pc:spChg>
         <pc:picChg chg="add mod ord">
           <ac:chgData name="De Giorgi, Giuseppe" userId="2bed3bf2-41f1-45b4-a919-c57b18870117" providerId="ADAL" clId="{EB3AAB68-1C81-4FAA-9471-49551CB4A501}" dt="2026-06-25T11:15:04.957" v="44" actId="1076"/>
           <ac:picMkLst>
@@ -418,7 +527,7 @@
         </pc:picChg>
       </pc:sldChg>
       <pc:sldChg chg="addSp delSp modSp new mod">
-        <pc:chgData name="De Giorgi, Giuseppe" userId="2bed3bf2-41f1-45b4-a919-c57b18870117" providerId="ADAL" clId="{EB3AAB68-1C81-4FAA-9471-49551CB4A501}" dt="2026-06-25T12:28:36.187" v="73" actId="26606"/>
+        <pc:chgData name="De Giorgi, Giuseppe" userId="2bed3bf2-41f1-45b4-a919-c57b18870117" providerId="ADAL" clId="{EB3AAB68-1C81-4FAA-9471-49551CB4A501}" dt="2026-06-26T08:40:48.007" v="345" actId="26606"/>
         <pc:sldMkLst>
           <pc:docMk/>
           <pc:sldMk cId="2620471829" sldId="265"/>
@@ -439,6 +548,14 @@
             <ac:spMk id="3" creationId="{BDC19E70-C55E-C0AE-BD22-621A3EEBD33D}"/>
           </ac:spMkLst>
         </pc:spChg>
+        <pc:spChg chg="del">
+          <ac:chgData name="De Giorgi, Giuseppe" userId="2bed3bf2-41f1-45b4-a919-c57b18870117" providerId="ADAL" clId="{EB3AAB68-1C81-4FAA-9471-49551CB4A501}" dt="2026-06-26T08:40:48.007" v="345" actId="26606"/>
+          <ac:spMkLst>
+            <pc:docMk/>
+            <pc:sldMk cId="2620471829" sldId="265"/>
+            <ac:spMk id="4" creationId="{FF042D96-D789-1625-8D76-A8FC77C82989}"/>
+          </ac:spMkLst>
+        </pc:spChg>
         <pc:spChg chg="add">
           <ac:chgData name="De Giorgi, Giuseppe" userId="2bed3bf2-41f1-45b4-a919-c57b18870117" providerId="ADAL" clId="{EB3AAB68-1C81-4FAA-9471-49551CB4A501}" dt="2026-06-25T12:28:36.187" v="73" actId="26606"/>
           <ac:spMkLst>
@@ -463,6 +580,14 @@
             <ac:spMk id="22" creationId="{00000000-0000-0000-0000-000000000000}"/>
           </ac:spMkLst>
         </pc:spChg>
+        <pc:spChg chg="add">
+          <ac:chgData name="De Giorgi, Giuseppe" userId="2bed3bf2-41f1-45b4-a919-c57b18870117" providerId="ADAL" clId="{EB3AAB68-1C81-4FAA-9471-49551CB4A501}" dt="2026-06-26T08:40:48.007" v="345" actId="26606"/>
+          <ac:spMkLst>
+            <pc:docMk/>
+            <pc:sldMk cId="2620471829" sldId="265"/>
+            <ac:spMk id="9001" creationId="{00000000-0000-0000-0000-000000000000}"/>
+          </ac:spMkLst>
+        </pc:spChg>
         <pc:picChg chg="add mod ord">
           <ac:chgData name="De Giorgi, Giuseppe" userId="2bed3bf2-41f1-45b4-a919-c57b18870117" providerId="ADAL" clId="{EB3AAB68-1C81-4FAA-9471-49551CB4A501}" dt="2026-06-25T12:28:36.187" v="73" actId="26606"/>
           <ac:picMkLst>
@@ -489,7 +614,7 @@
         </pc:picChg>
       </pc:sldChg>
       <pc:sldChg chg="addSp delSp modSp new mod">
-        <pc:chgData name="De Giorgi, Giuseppe" userId="2bed3bf2-41f1-45b4-a919-c57b18870117" providerId="ADAL" clId="{EB3AAB68-1C81-4FAA-9471-49551CB4A501}" dt="2026-06-25T12:49:05.736" v="86" actId="26606"/>
+        <pc:chgData name="De Giorgi, Giuseppe" userId="2bed3bf2-41f1-45b4-a919-c57b18870117" providerId="ADAL" clId="{EB3AAB68-1C81-4FAA-9471-49551CB4A501}" dt="2026-06-26T08:40:48.007" v="345" actId="26606"/>
         <pc:sldMkLst>
           <pc:docMk/>
           <pc:sldMk cId="2162535495" sldId="266"/>
@@ -511,7 +636,7 @@
           </ac:spMkLst>
         </pc:spChg>
         <pc:spChg chg="add del">
-          <ac:chgData name="De Giorgi, Giuseppe" userId="2bed3bf2-41f1-45b4-a919-c57b18870117" providerId="ADAL" clId="{EB3AAB68-1C81-4FAA-9471-49551CB4A501}" dt="2026-06-25T12:49:05.736" v="86" actId="26606"/>
+          <ac:chgData name="De Giorgi, Giuseppe" userId="2bed3bf2-41f1-45b4-a919-c57b18870117" providerId="ADAL" clId="{EB3AAB68-1C81-4FAA-9471-49551CB4A501}" dt="2026-06-26T08:40:48.007" v="345" actId="26606"/>
           <ac:spMkLst>
             <pc:docMk/>
             <pc:sldMk cId="2162535495" sldId="266"/>
@@ -534,6 +659,14 @@
             <ac:spMk id="21" creationId="{00000000-0000-0000-0000-000000000000}"/>
           </ac:spMkLst>
         </pc:spChg>
+        <pc:spChg chg="add">
+          <ac:chgData name="De Giorgi, Giuseppe" userId="2bed3bf2-41f1-45b4-a919-c57b18870117" providerId="ADAL" clId="{EB3AAB68-1C81-4FAA-9471-49551CB4A501}" dt="2026-06-26T08:40:48.007" v="345" actId="26606"/>
+          <ac:spMkLst>
+            <pc:docMk/>
+            <pc:sldMk cId="2162535495" sldId="266"/>
+            <ac:spMk id="9001" creationId="{00000000-0000-0000-0000-000000000000}"/>
+          </ac:spMkLst>
+        </pc:spChg>
         <pc:picChg chg="add mod ord">
           <ac:chgData name="De Giorgi, Giuseppe" userId="2bed3bf2-41f1-45b4-a919-c57b18870117" providerId="ADAL" clId="{EB3AAB68-1C81-4FAA-9471-49551CB4A501}" dt="2026-06-25T12:42:14.138" v="84" actId="26606"/>
           <ac:picMkLst>
@@ -551,15 +684,31 @@
           </ac:picMkLst>
         </pc:picChg>
       </pc:sldChg>
-      <pc:sldChg chg="add">
-        <pc:chgData name="De Giorgi, Giuseppe" userId="2bed3bf2-41f1-45b4-a919-c57b18870117" providerId="ADAL" clId="{EB3AAB68-1C81-4FAA-9471-49551CB4A501}" dt="2026-06-25T12:49:05.736" v="86" actId="26606"/>
+      <pc:sldChg chg="addSp delSp add mod">
+        <pc:chgData name="De Giorgi, Giuseppe" userId="2bed3bf2-41f1-45b4-a919-c57b18870117" providerId="ADAL" clId="{EB3AAB68-1C81-4FAA-9471-49551CB4A501}" dt="2026-06-26T08:40:48.007" v="345" actId="26606"/>
         <pc:sldMkLst>
           <pc:docMk/>
           <pc:sldMk cId="4215556393" sldId="267"/>
         </pc:sldMkLst>
+        <pc:spChg chg="del">
+          <ac:chgData name="De Giorgi, Giuseppe" userId="2bed3bf2-41f1-45b4-a919-c57b18870117" providerId="ADAL" clId="{EB3AAB68-1C81-4FAA-9471-49551CB4A501}" dt="2026-06-26T08:40:48.007" v="345" actId="26606"/>
+          <ac:spMkLst>
+            <pc:docMk/>
+            <pc:sldMk cId="4215556393" sldId="267"/>
+            <ac:spMk id="4" creationId="{442F80AC-F994-FCA6-F3E5-539FB789E8E8}"/>
+          </ac:spMkLst>
+        </pc:spChg>
+        <pc:spChg chg="add">
+          <ac:chgData name="De Giorgi, Giuseppe" userId="2bed3bf2-41f1-45b4-a919-c57b18870117" providerId="ADAL" clId="{EB3AAB68-1C81-4FAA-9471-49551CB4A501}" dt="2026-06-26T08:40:48.007" v="345" actId="26606"/>
+          <ac:spMkLst>
+            <pc:docMk/>
+            <pc:sldMk cId="4215556393" sldId="267"/>
+            <ac:spMk id="9001" creationId="{00000000-0000-0000-0000-000000000000}"/>
+          </ac:spMkLst>
+        </pc:spChg>
       </pc:sldChg>
       <pc:sldChg chg="addSp delSp modSp new mod modClrScheme chgLayout">
-        <pc:chgData name="De Giorgi, Giuseppe" userId="2bed3bf2-41f1-45b4-a919-c57b18870117" providerId="ADAL" clId="{EB3AAB68-1C81-4FAA-9471-49551CB4A501}" dt="2026-06-25T12:54:36.469" v="92" actId="26606"/>
+        <pc:chgData name="De Giorgi, Giuseppe" userId="2bed3bf2-41f1-45b4-a919-c57b18870117" providerId="ADAL" clId="{EB3AAB68-1C81-4FAA-9471-49551CB4A501}" dt="2026-06-26T08:40:48.007" v="345" actId="26606"/>
         <pc:sldMkLst>
           <pc:docMk/>
           <pc:sldMk cId="1327142876" sldId="268"/>
@@ -602,6 +751,14 @@
             <pc:docMk/>
             <pc:sldMk cId="1327142876" sldId="268"/>
             <ac:spMk id="13" creationId="{35072F51-6511-4074-1784-581D7ABFCAF5}"/>
+          </ac:spMkLst>
+        </pc:spChg>
+        <pc:spChg chg="add">
+          <ac:chgData name="De Giorgi, Giuseppe" userId="2bed3bf2-41f1-45b4-a919-c57b18870117" providerId="ADAL" clId="{EB3AAB68-1C81-4FAA-9471-49551CB4A501}" dt="2026-06-26T08:40:48.007" v="345" actId="26606"/>
+          <ac:spMkLst>
+            <pc:docMk/>
+            <pc:sldMk cId="1327142876" sldId="268"/>
+            <ac:spMk id="9001" creationId="{00000000-0000-0000-0000-000000000000}"/>
           </ac:spMkLst>
         </pc:spChg>
         <pc:picChg chg="add mod ord">
@@ -621,7 +778,7 @@
         </pc:sldMkLst>
       </pc:sldChg>
       <pc:sldChg chg="addSp delSp modSp new mod">
-        <pc:chgData name="De Giorgi, Giuseppe" userId="2bed3bf2-41f1-45b4-a919-c57b18870117" providerId="ADAL" clId="{EB3AAB68-1C81-4FAA-9471-49551CB4A501}" dt="2026-06-25T14:45:19.261" v="132" actId="478"/>
+        <pc:chgData name="De Giorgi, Giuseppe" userId="2bed3bf2-41f1-45b4-a919-c57b18870117" providerId="ADAL" clId="{EB3AAB68-1C81-4FAA-9471-49551CB4A501}" dt="2026-06-26T08:40:48.007" v="345" actId="26606"/>
         <pc:sldMkLst>
           <pc:docMk/>
           <pc:sldMk cId="3205643292" sldId="269"/>
@@ -690,6 +847,14 @@
             <ac:spMk id="24" creationId="{00000000-0000-0000-0000-000000000000}"/>
           </ac:spMkLst>
         </pc:spChg>
+        <pc:spChg chg="add">
+          <ac:chgData name="De Giorgi, Giuseppe" userId="2bed3bf2-41f1-45b4-a919-c57b18870117" providerId="ADAL" clId="{EB3AAB68-1C81-4FAA-9471-49551CB4A501}" dt="2026-06-26T08:40:48.007" v="345" actId="26606"/>
+          <ac:spMkLst>
+            <pc:docMk/>
+            <pc:sldMk cId="3205643292" sldId="269"/>
+            <ac:spMk id="9001" creationId="{00000000-0000-0000-0000-000000000000}"/>
+          </ac:spMkLst>
+        </pc:spChg>
         <pc:picChg chg="add mod">
           <ac:chgData name="De Giorgi, Giuseppe" userId="2bed3bf2-41f1-45b4-a919-c57b18870117" providerId="ADAL" clId="{EB3AAB68-1C81-4FAA-9471-49551CB4A501}" dt="2026-06-25T14:23:43.204" v="129" actId="26606"/>
           <ac:picMkLst>
@@ -724,7 +889,7 @@
         </pc:picChg>
       </pc:sldChg>
       <pc:sldChg chg="addSp delSp modSp new mod modClrScheme chgLayout">
-        <pc:chgData name="De Giorgi, Giuseppe" userId="2bed3bf2-41f1-45b4-a919-c57b18870117" providerId="ADAL" clId="{EB3AAB68-1C81-4FAA-9471-49551CB4A501}" dt="2026-06-25T15:01:08.299" v="200" actId="1076"/>
+        <pc:chgData name="De Giorgi, Giuseppe" userId="2bed3bf2-41f1-45b4-a919-c57b18870117" providerId="ADAL" clId="{EB3AAB68-1C81-4FAA-9471-49551CB4A501}" dt="2026-06-26T08:40:48.007" v="345" actId="26606"/>
         <pc:sldMkLst>
           <pc:docMk/>
           <pc:sldMk cId="3340385257" sldId="270"/>
@@ -777,6 +942,14 @@
             <ac:spMk id="19" creationId="{A39BE94F-F7E7-8DF0-8974-9286A61843D6}"/>
           </ac:spMkLst>
         </pc:spChg>
+        <pc:spChg chg="add">
+          <ac:chgData name="De Giorgi, Giuseppe" userId="2bed3bf2-41f1-45b4-a919-c57b18870117" providerId="ADAL" clId="{EB3AAB68-1C81-4FAA-9471-49551CB4A501}" dt="2026-06-26T08:40:48.007" v="345" actId="26606"/>
+          <ac:spMkLst>
+            <pc:docMk/>
+            <pc:sldMk cId="3340385257" sldId="270"/>
+            <ac:spMk id="9001" creationId="{00000000-0000-0000-0000-000000000000}"/>
+          </ac:spMkLst>
+        </pc:spChg>
         <pc:picChg chg="add del mod ord">
           <ac:chgData name="De Giorgi, Giuseppe" userId="2bed3bf2-41f1-45b4-a919-c57b18870117" providerId="ADAL" clId="{EB3AAB68-1C81-4FAA-9471-49551CB4A501}" dt="2026-06-25T14:46:57.299" v="151" actId="931"/>
           <ac:picMkLst>
@@ -803,7 +976,7 @@
         </pc:picChg>
       </pc:sldChg>
       <pc:sldChg chg="addSp delSp modSp new mod ord">
-        <pc:chgData name="De Giorgi, Giuseppe" userId="2bed3bf2-41f1-45b4-a919-c57b18870117" providerId="ADAL" clId="{EB3AAB68-1C81-4FAA-9471-49551CB4A501}" dt="2026-06-25T15:05:27.549" v="230" actId="1076"/>
+        <pc:chgData name="De Giorgi, Giuseppe" userId="2bed3bf2-41f1-45b4-a919-c57b18870117" providerId="ADAL" clId="{EB3AAB68-1C81-4FAA-9471-49551CB4A501}" dt="2026-06-26T08:40:48.007" v="345" actId="26606"/>
         <pc:sldMkLst>
           <pc:docMk/>
           <pc:sldMk cId="621036551" sldId="271"/>
@@ -886,6 +1059,14 @@
             <pc:docMk/>
             <pc:sldMk cId="621036551" sldId="271"/>
             <ac:spMk id="26" creationId="{00000000-0000-0000-0000-000000000000}"/>
+          </ac:spMkLst>
+        </pc:spChg>
+        <pc:spChg chg="add">
+          <ac:chgData name="De Giorgi, Giuseppe" userId="2bed3bf2-41f1-45b4-a919-c57b18870117" providerId="ADAL" clId="{EB3AAB68-1C81-4FAA-9471-49551CB4A501}" dt="2026-06-26T08:40:48.007" v="345" actId="26606"/>
+          <ac:spMkLst>
+            <pc:docMk/>
+            <pc:sldMk cId="621036551" sldId="271"/>
+            <ac:spMk id="9001" creationId="{00000000-0000-0000-0000-000000000000}"/>
           </ac:spMkLst>
         </pc:spChg>
         <pc:picChg chg="add mod ord">
@@ -945,7 +1126,7 @@
         </pc:picChg>
       </pc:sldChg>
       <pc:sldChg chg="addSp delSp modSp new mod">
-        <pc:chgData name="De Giorgi, Giuseppe" userId="2bed3bf2-41f1-45b4-a919-c57b18870117" providerId="ADAL" clId="{EB3AAB68-1C81-4FAA-9471-49551CB4A501}" dt="2026-06-25T15:12:53.514" v="240" actId="26606"/>
+        <pc:chgData name="De Giorgi, Giuseppe" userId="2bed3bf2-41f1-45b4-a919-c57b18870117" providerId="ADAL" clId="{EB3AAB68-1C81-4FAA-9471-49551CB4A501}" dt="2026-06-26T08:40:48.007" v="345" actId="26606"/>
         <pc:sldMkLst>
           <pc:docMk/>
           <pc:sldMk cId="2848846696" sldId="272"/>
@@ -966,8 +1147,8 @@
             <ac:spMk id="3" creationId="{5906BDF9-9CFD-233F-4770-1F25C570221F}"/>
           </ac:spMkLst>
         </pc:spChg>
-        <pc:spChg chg="add">
-          <ac:chgData name="De Giorgi, Giuseppe" userId="2bed3bf2-41f1-45b4-a919-c57b18870117" providerId="ADAL" clId="{EB3AAB68-1C81-4FAA-9471-49551CB4A501}" dt="2026-06-25T15:12:53.514" v="240" actId="26606"/>
+        <pc:spChg chg="add del">
+          <ac:chgData name="De Giorgi, Giuseppe" userId="2bed3bf2-41f1-45b4-a919-c57b18870117" providerId="ADAL" clId="{EB3AAB68-1C81-4FAA-9471-49551CB4A501}" dt="2026-06-26T08:40:48.007" v="345" actId="26606"/>
           <ac:spMkLst>
             <pc:docMk/>
             <pc:sldMk cId="2848846696" sldId="272"/>
@@ -998,6 +1179,14 @@
             <ac:spMk id="21" creationId="{00000000-0000-0000-0000-000000000000}"/>
           </ac:spMkLst>
         </pc:spChg>
+        <pc:spChg chg="add">
+          <ac:chgData name="De Giorgi, Giuseppe" userId="2bed3bf2-41f1-45b4-a919-c57b18870117" providerId="ADAL" clId="{EB3AAB68-1C81-4FAA-9471-49551CB4A501}" dt="2026-06-26T08:40:48.007" v="345" actId="26606"/>
+          <ac:spMkLst>
+            <pc:docMk/>
+            <pc:sldMk cId="2848846696" sldId="272"/>
+            <ac:spMk id="9001" creationId="{00000000-0000-0000-0000-000000000000}"/>
+          </ac:spMkLst>
+        </pc:spChg>
         <pc:picChg chg="add mod ord">
           <ac:chgData name="De Giorgi, Giuseppe" userId="2bed3bf2-41f1-45b4-a919-c57b18870117" providerId="ADAL" clId="{EB3AAB68-1C81-4FAA-9471-49551CB4A501}" dt="2026-06-25T15:12:53.514" v="240" actId="26606"/>
           <ac:picMkLst>
@@ -1016,7 +1205,7 @@
         </pc:picChg>
       </pc:sldChg>
       <pc:sldChg chg="addSp delSp modSp new mod">
-        <pc:chgData name="De Giorgi, Giuseppe" userId="2bed3bf2-41f1-45b4-a919-c57b18870117" providerId="ADAL" clId="{EB3AAB68-1C81-4FAA-9471-49551CB4A501}" dt="2026-06-26T07:00:35.397" v="242" actId="26606"/>
+        <pc:chgData name="De Giorgi, Giuseppe" userId="2bed3bf2-41f1-45b4-a919-c57b18870117" providerId="ADAL" clId="{EB3AAB68-1C81-4FAA-9471-49551CB4A501}" dt="2026-06-26T08:40:48.007" v="345" actId="26606"/>
         <pc:sldMkLst>
           <pc:docMk/>
           <pc:sldMk cId="3530519921" sldId="273"/>
@@ -1037,6 +1226,14 @@
             <ac:spMk id="3" creationId="{0E31993D-A676-891A-F9A1-4C4AFA299448}"/>
           </ac:spMkLst>
         </pc:spChg>
+        <pc:spChg chg="del">
+          <ac:chgData name="De Giorgi, Giuseppe" userId="2bed3bf2-41f1-45b4-a919-c57b18870117" providerId="ADAL" clId="{EB3AAB68-1C81-4FAA-9471-49551CB4A501}" dt="2026-06-26T08:40:48.007" v="345" actId="26606"/>
+          <ac:spMkLst>
+            <pc:docMk/>
+            <pc:sldMk cId="3530519921" sldId="273"/>
+            <ac:spMk id="4" creationId="{3DBE7ABC-976E-7AF6-1271-204B59B9B30F}"/>
+          </ac:spMkLst>
+        </pc:spChg>
         <pc:spChg chg="add">
           <ac:chgData name="De Giorgi, Giuseppe" userId="2bed3bf2-41f1-45b4-a919-c57b18870117" providerId="ADAL" clId="{EB3AAB68-1C81-4FAA-9471-49551CB4A501}" dt="2026-06-26T07:00:35.397" v="242" actId="26606"/>
           <ac:spMkLst>
@@ -1093,6 +1290,14 @@
             <ac:spMk id="107" creationId="{00000000-0000-0000-0000-000000000000}"/>
           </ac:spMkLst>
         </pc:spChg>
+        <pc:spChg chg="add">
+          <ac:chgData name="De Giorgi, Giuseppe" userId="2bed3bf2-41f1-45b4-a919-c57b18870117" providerId="ADAL" clId="{EB3AAB68-1C81-4FAA-9471-49551CB4A501}" dt="2026-06-26T08:40:48.007" v="345" actId="26606"/>
+          <ac:spMkLst>
+            <pc:docMk/>
+            <pc:sldMk cId="3530519921" sldId="273"/>
+            <ac:spMk id="9001" creationId="{00000000-0000-0000-0000-000000000000}"/>
+          </ac:spMkLst>
+        </pc:spChg>
         <pc:cxnChg chg="add">
           <ac:chgData name="De Giorgi, Giuseppe" userId="2bed3bf2-41f1-45b4-a919-c57b18870117" providerId="ADAL" clId="{EB3AAB68-1C81-4FAA-9471-49551CB4A501}" dt="2026-06-26T07:00:35.397" v="242" actId="26606"/>
           <ac:cxnSpMkLst>
@@ -1103,7 +1308,7 @@
         </pc:cxnChg>
       </pc:sldChg>
       <pc:sldChg chg="addSp delSp modSp new mod">
-        <pc:chgData name="De Giorgi, Giuseppe" userId="2bed3bf2-41f1-45b4-a919-c57b18870117" providerId="ADAL" clId="{EB3AAB68-1C81-4FAA-9471-49551CB4A501}" dt="2026-06-26T07:18:21.724" v="256" actId="1076"/>
+        <pc:chgData name="De Giorgi, Giuseppe" userId="2bed3bf2-41f1-45b4-a919-c57b18870117" providerId="ADAL" clId="{EB3AAB68-1C81-4FAA-9471-49551CB4A501}" dt="2026-06-26T08:40:48.007" v="345" actId="26606"/>
         <pc:sldMkLst>
           <pc:docMk/>
           <pc:sldMk cId="2156867253" sldId="274"/>
@@ -1132,6 +1337,14 @@
             <ac:spMk id="4" creationId="{24D79C5F-9F4A-F9AC-2109-5ED5186547D9}"/>
           </ac:spMkLst>
         </pc:spChg>
+        <pc:spChg chg="del">
+          <ac:chgData name="De Giorgi, Giuseppe" userId="2bed3bf2-41f1-45b4-a919-c57b18870117" providerId="ADAL" clId="{EB3AAB68-1C81-4FAA-9471-49551CB4A501}" dt="2026-06-26T08:40:48.007" v="345" actId="26606"/>
+          <ac:spMkLst>
+            <pc:docMk/>
+            <pc:sldMk cId="2156867253" sldId="274"/>
+            <ac:spMk id="5" creationId="{163A3365-3442-D4D6-C8C1-B0FF9B293539}"/>
+          </ac:spMkLst>
+        </pc:spChg>
         <pc:spChg chg="add del">
           <ac:chgData name="De Giorgi, Giuseppe" userId="2bed3bf2-41f1-45b4-a919-c57b18870117" providerId="ADAL" clId="{EB3AAB68-1C81-4FAA-9471-49551CB4A501}" dt="2026-06-26T07:18:08.026" v="251" actId="478"/>
           <ac:spMkLst>
@@ -1164,6 +1377,14 @@
             <ac:spMk id="46" creationId="{00000000-0000-0000-0000-000000000000}"/>
           </ac:spMkLst>
         </pc:spChg>
+        <pc:spChg chg="add">
+          <ac:chgData name="De Giorgi, Giuseppe" userId="2bed3bf2-41f1-45b4-a919-c57b18870117" providerId="ADAL" clId="{EB3AAB68-1C81-4FAA-9471-49551CB4A501}" dt="2026-06-26T08:40:48.007" v="345" actId="26606"/>
+          <ac:spMkLst>
+            <pc:docMk/>
+            <pc:sldMk cId="2156867253" sldId="274"/>
+            <ac:spMk id="9001" creationId="{00000000-0000-0000-0000-000000000000}"/>
+          </ac:spMkLst>
+        </pc:spChg>
         <pc:picChg chg="add del mod ord">
           <ac:chgData name="De Giorgi, Giuseppe" userId="2bed3bf2-41f1-45b4-a919-c57b18870117" providerId="ADAL" clId="{EB3AAB68-1C81-4FAA-9471-49551CB4A501}" dt="2026-06-26T07:13:19.769" v="249" actId="26606"/>
           <ac:picMkLst>
@@ -1221,14 +1442,14 @@
           </ac:cxnSpMkLst>
         </pc:cxnChg>
       </pc:sldChg>
-      <pc:sldChg chg="addSp modSp new mod ord modClrScheme chgLayout">
-        <pc:chgData name="De Giorgi, Giuseppe" userId="2bed3bf2-41f1-45b4-a919-c57b18870117" providerId="ADAL" clId="{EB3AAB68-1C81-4FAA-9471-49551CB4A501}" dt="2026-06-26T07:40:30.914" v="280" actId="26606"/>
+      <pc:sldChg chg="addSp delSp modSp new mod ord modClrScheme chgLayout">
+        <pc:chgData name="De Giorgi, Giuseppe" userId="2bed3bf2-41f1-45b4-a919-c57b18870117" providerId="ADAL" clId="{EB3AAB68-1C81-4FAA-9471-49551CB4A501}" dt="2026-06-26T08:40:48.007" v="345" actId="26606"/>
         <pc:sldMkLst>
           <pc:docMk/>
           <pc:sldMk cId="654581296" sldId="275"/>
         </pc:sldMkLst>
-        <pc:spChg chg="mod">
-          <ac:chgData name="De Giorgi, Giuseppe" userId="2bed3bf2-41f1-45b4-a919-c57b18870117" providerId="ADAL" clId="{EB3AAB68-1C81-4FAA-9471-49551CB4A501}" dt="2026-06-26T07:18:42.705" v="260" actId="26606"/>
+        <pc:spChg chg="del mod">
+          <ac:chgData name="De Giorgi, Giuseppe" userId="2bed3bf2-41f1-45b4-a919-c57b18870117" providerId="ADAL" clId="{EB3AAB68-1C81-4FAA-9471-49551CB4A501}" dt="2026-06-26T08:40:48.007" v="345" actId="26606"/>
           <ac:spMkLst>
             <pc:docMk/>
             <pc:sldMk cId="654581296" sldId="275"/>
@@ -1265,6 +1486,14 @@
             <pc:docMk/>
             <pc:sldMk cId="654581296" sldId="275"/>
             <ac:spMk id="22" creationId="{00000000-0000-0000-0000-000000000000}"/>
+          </ac:spMkLst>
+        </pc:spChg>
+        <pc:spChg chg="add">
+          <ac:chgData name="De Giorgi, Giuseppe" userId="2bed3bf2-41f1-45b4-a919-c57b18870117" providerId="ADAL" clId="{EB3AAB68-1C81-4FAA-9471-49551CB4A501}" dt="2026-06-26T08:40:48.007" v="345" actId="26606"/>
+          <ac:spMkLst>
+            <pc:docMk/>
+            <pc:sldMk cId="654581296" sldId="275"/>
+            <ac:spMk id="9001" creationId="{00000000-0000-0000-0000-000000000000}"/>
           </ac:spMkLst>
         </pc:spChg>
         <pc:picChg chg="add mod">
@@ -1300,7 +1529,7 @@
         </pc:sldMkLst>
       </pc:sldChg>
       <pc:sldChg chg="addSp delSp modSp new mod">
-        <pc:chgData name="De Giorgi, Giuseppe" userId="2bed3bf2-41f1-45b4-a919-c57b18870117" providerId="ADAL" clId="{EB3AAB68-1C81-4FAA-9471-49551CB4A501}" dt="2026-06-26T07:51:50.887" v="299" actId="26606"/>
+        <pc:chgData name="De Giorgi, Giuseppe" userId="2bed3bf2-41f1-45b4-a919-c57b18870117" providerId="ADAL" clId="{EB3AAB68-1C81-4FAA-9471-49551CB4A501}" dt="2026-06-26T08:40:48.007" v="345" actId="26606"/>
         <pc:sldMkLst>
           <pc:docMk/>
           <pc:sldMk cId="375833456" sldId="276"/>
@@ -1321,12 +1550,28 @@
             <ac:spMk id="3" creationId="{803ECFCB-36FE-7707-1832-87F340FA653F}"/>
           </ac:spMkLst>
         </pc:spChg>
+        <pc:spChg chg="del">
+          <ac:chgData name="De Giorgi, Giuseppe" userId="2bed3bf2-41f1-45b4-a919-c57b18870117" providerId="ADAL" clId="{EB3AAB68-1C81-4FAA-9471-49551CB4A501}" dt="2026-06-26T08:40:48.007" v="345" actId="26606"/>
+          <ac:spMkLst>
+            <pc:docMk/>
+            <pc:sldMk cId="375833456" sldId="276"/>
+            <ac:spMk id="4" creationId="{F36EF665-89F7-695C-0291-F3C97F5F8D82}"/>
+          </ac:spMkLst>
+        </pc:spChg>
         <pc:spChg chg="add">
           <ac:chgData name="De Giorgi, Giuseppe" userId="2bed3bf2-41f1-45b4-a919-c57b18870117" providerId="ADAL" clId="{EB3AAB68-1C81-4FAA-9471-49551CB4A501}" dt="2026-06-26T07:51:50.887" v="299" actId="26606"/>
           <ac:spMkLst>
             <pc:docMk/>
             <pc:sldMk cId="375833456" sldId="276"/>
             <ac:spMk id="20" creationId="{00000000-0000-0000-0000-000000000000}"/>
+          </ac:spMkLst>
+        </pc:spChg>
+        <pc:spChg chg="add">
+          <ac:chgData name="De Giorgi, Giuseppe" userId="2bed3bf2-41f1-45b4-a919-c57b18870117" providerId="ADAL" clId="{EB3AAB68-1C81-4FAA-9471-49551CB4A501}" dt="2026-06-26T08:40:48.007" v="345" actId="26606"/>
+          <ac:spMkLst>
+            <pc:docMk/>
+            <pc:sldMk cId="375833456" sldId="276"/>
+            <ac:spMk id="9001" creationId="{00000000-0000-0000-0000-000000000000}"/>
           </ac:spMkLst>
         </pc:spChg>
         <pc:picChg chg="add mod ord">
@@ -1347,7 +1592,7 @@
         </pc:picChg>
       </pc:sldChg>
       <pc:sldChg chg="addSp delSp modSp new mod">
-        <pc:chgData name="De Giorgi, Giuseppe" userId="2bed3bf2-41f1-45b4-a919-c57b18870117" providerId="ADAL" clId="{EB3AAB68-1C81-4FAA-9471-49551CB4A501}" dt="2026-06-26T08:10:25.758" v="329" actId="26606"/>
+        <pc:chgData name="De Giorgi, Giuseppe" userId="2bed3bf2-41f1-45b4-a919-c57b18870117" providerId="ADAL" clId="{EB3AAB68-1C81-4FAA-9471-49551CB4A501}" dt="2026-06-26T08:40:48.007" v="345" actId="26606"/>
         <pc:sldMkLst>
           <pc:docMk/>
           <pc:sldMk cId="3046170350" sldId="277"/>
@@ -1368,12 +1613,28 @@
             <ac:spMk id="3" creationId="{31A2B82F-415C-839D-0873-2907F706EDCF}"/>
           </ac:spMkLst>
         </pc:spChg>
-        <pc:spChg chg="add">
-          <ac:chgData name="De Giorgi, Giuseppe" userId="2bed3bf2-41f1-45b4-a919-c57b18870117" providerId="ADAL" clId="{EB3AAB68-1C81-4FAA-9471-49551CB4A501}" dt="2026-06-26T08:10:25.758" v="329" actId="26606"/>
+        <pc:spChg chg="del">
+          <ac:chgData name="De Giorgi, Giuseppe" userId="2bed3bf2-41f1-45b4-a919-c57b18870117" providerId="ADAL" clId="{EB3AAB68-1C81-4FAA-9471-49551CB4A501}" dt="2026-06-26T08:40:48.007" v="345" actId="26606"/>
+          <ac:spMkLst>
+            <pc:docMk/>
+            <pc:sldMk cId="3046170350" sldId="277"/>
+            <ac:spMk id="4" creationId="{1CEAF708-0640-3FFD-C51B-9171CC8ACA01}"/>
+          </ac:spMkLst>
+        </pc:spChg>
+        <pc:spChg chg="add mod">
+          <ac:chgData name="De Giorgi, Giuseppe" userId="2bed3bf2-41f1-45b4-a919-c57b18870117" providerId="ADAL" clId="{EB3AAB68-1C81-4FAA-9471-49551CB4A501}" dt="2026-06-26T08:30:06.526" v="343" actId="20577"/>
           <ac:spMkLst>
             <pc:docMk/>
             <pc:sldMk cId="3046170350" sldId="277"/>
             <ac:spMk id="20" creationId="{00000000-0000-0000-0000-000000000000}"/>
+          </ac:spMkLst>
+        </pc:spChg>
+        <pc:spChg chg="add">
+          <ac:chgData name="De Giorgi, Giuseppe" userId="2bed3bf2-41f1-45b4-a919-c57b18870117" providerId="ADAL" clId="{EB3AAB68-1C81-4FAA-9471-49551CB4A501}" dt="2026-06-26T08:40:48.007" v="345" actId="26606"/>
+          <ac:spMkLst>
+            <pc:docMk/>
+            <pc:sldMk cId="3046170350" sldId="277"/>
+            <ac:spMk id="9001" creationId="{00000000-0000-0000-0000-000000000000}"/>
           </ac:spMkLst>
         </pc:spChg>
         <pc:picChg chg="add mod">
@@ -1410,7 +1671,7 @@
         </pc:picChg>
       </pc:sldChg>
       <pc:sldChg chg="addSp delSp modSp new mod">
-        <pc:chgData name="De Giorgi, Giuseppe" userId="2bed3bf2-41f1-45b4-a919-c57b18870117" providerId="ADAL" clId="{EB3AAB68-1C81-4FAA-9471-49551CB4A501}" dt="2026-06-26T08:10:25.758" v="329" actId="26606"/>
+        <pc:chgData name="De Giorgi, Giuseppe" userId="2bed3bf2-41f1-45b4-a919-c57b18870117" providerId="ADAL" clId="{EB3AAB68-1C81-4FAA-9471-49551CB4A501}" dt="2026-06-26T08:40:48.007" v="345" actId="26606"/>
         <pc:sldMkLst>
           <pc:docMk/>
           <pc:sldMk cId="368029946" sldId="278"/>
@@ -1431,12 +1692,28 @@
             <ac:spMk id="3" creationId="{7CF1CB2F-B2B9-B43F-FBEC-77FB75E40C3A}"/>
           </ac:spMkLst>
         </pc:spChg>
+        <pc:spChg chg="del">
+          <ac:chgData name="De Giorgi, Giuseppe" userId="2bed3bf2-41f1-45b4-a919-c57b18870117" providerId="ADAL" clId="{EB3AAB68-1C81-4FAA-9471-49551CB4A501}" dt="2026-06-26T08:40:48.007" v="345" actId="26606"/>
+          <ac:spMkLst>
+            <pc:docMk/>
+            <pc:sldMk cId="368029946" sldId="278"/>
+            <ac:spMk id="4" creationId="{DD68749D-B5FB-D94F-FC3B-D037D342DD7D}"/>
+          </ac:spMkLst>
+        </pc:spChg>
         <pc:spChg chg="add">
           <ac:chgData name="De Giorgi, Giuseppe" userId="2bed3bf2-41f1-45b4-a919-c57b18870117" providerId="ADAL" clId="{EB3AAB68-1C81-4FAA-9471-49551CB4A501}" dt="2026-06-26T08:10:25.758" v="329" actId="26606"/>
           <ac:spMkLst>
             <pc:docMk/>
             <pc:sldMk cId="368029946" sldId="278"/>
             <ac:spMk id="20" creationId="{00000000-0000-0000-0000-000000000000}"/>
+          </ac:spMkLst>
+        </pc:spChg>
+        <pc:spChg chg="add">
+          <ac:chgData name="De Giorgi, Giuseppe" userId="2bed3bf2-41f1-45b4-a919-c57b18870117" providerId="ADAL" clId="{EB3AAB68-1C81-4FAA-9471-49551CB4A501}" dt="2026-06-26T08:40:48.007" v="345" actId="26606"/>
+          <ac:spMkLst>
+            <pc:docMk/>
+            <pc:sldMk cId="368029946" sldId="278"/>
+            <ac:spMk id="9001" creationId="{00000000-0000-0000-0000-000000000000}"/>
           </ac:spMkLst>
         </pc:spChg>
         <pc:picChg chg="add mod">
@@ -1456,6 +1733,630 @@
           </ac:picMkLst>
         </pc:picChg>
       </pc:sldChg>
+      <pc:sldMasterChg chg="add modSldLayout sldLayoutOrd">
+        <pc:chgData name="De Giorgi, Giuseppe" userId="2bed3bf2-41f1-45b4-a919-c57b18870117" providerId="ADAL" clId="{EB3AAB68-1C81-4FAA-9471-49551CB4A501}" dt="2026-06-26T08:40:48.007" v="345" actId="26606"/>
+        <pc:sldMasterMkLst>
+          <pc:docMk/>
+          <pc:sldMasterMk cId="3034982234" sldId="2147483746"/>
+        </pc:sldMasterMkLst>
+        <pc:sldLayoutChg chg="modSp mod ord">
+          <pc:chgData name="De Giorgi, Giuseppe" userId="2bed3bf2-41f1-45b4-a919-c57b18870117" providerId="ADAL" clId="{EB3AAB68-1C81-4FAA-9471-49551CB4A501}" dt="2026-06-26T08:40:48.007" v="345" actId="26606"/>
+          <pc:sldLayoutMkLst>
+            <pc:docMk/>
+            <pc:sldMasterMk cId="3034982234" sldId="2147483746"/>
+            <pc:sldLayoutMk cId="811860513" sldId="2147483732"/>
+          </pc:sldLayoutMkLst>
+          <pc:spChg chg="mod">
+            <ac:chgData name="De Giorgi, Giuseppe" userId="2bed3bf2-41f1-45b4-a919-c57b18870117" providerId="ADAL" clId="{EB3AAB68-1C81-4FAA-9471-49551CB4A501}" dt="2026-06-26T08:40:48.007" v="345" actId="26606"/>
+            <ac:spMkLst>
+              <pc:docMk/>
+              <pc:sldMasterMk cId="3034982234" sldId="2147483746"/>
+              <pc:sldLayoutMk cId="811860513" sldId="2147483732"/>
+              <ac:spMk id="2" creationId="{00000000-0000-0000-0000-000000000000}"/>
+            </ac:spMkLst>
+          </pc:spChg>
+          <pc:spChg chg="mod">
+            <ac:chgData name="De Giorgi, Giuseppe" userId="2bed3bf2-41f1-45b4-a919-c57b18870117" providerId="ADAL" clId="{EB3AAB68-1C81-4FAA-9471-49551CB4A501}" dt="2026-06-26T08:40:48.007" v="345" actId="26606"/>
+            <ac:spMkLst>
+              <pc:docMk/>
+              <pc:sldMasterMk cId="3034982234" sldId="2147483746"/>
+              <pc:sldLayoutMk cId="811860513" sldId="2147483732"/>
+              <ac:spMk id="6" creationId="{7392073F-158F-44A3-8913-917AFFC1BC20}"/>
+            </ac:spMkLst>
+          </pc:spChg>
+          <pc:spChg chg="mod">
+            <ac:chgData name="De Giorgi, Giuseppe" userId="2bed3bf2-41f1-45b4-a919-c57b18870117" providerId="ADAL" clId="{EB3AAB68-1C81-4FAA-9471-49551CB4A501}" dt="2026-06-26T08:40:48.007" v="345" actId="26606"/>
+            <ac:spMkLst>
+              <pc:docMk/>
+              <pc:sldMasterMk cId="3034982234" sldId="2147483746"/>
+              <pc:sldLayoutMk cId="811860513" sldId="2147483732"/>
+              <ac:spMk id="7" creationId="{EED72207-24CA-42B7-A975-2F8E41CBA904}"/>
+            </ac:spMkLst>
+          </pc:spChg>
+          <pc:spChg chg="mod">
+            <ac:chgData name="De Giorgi, Giuseppe" userId="2bed3bf2-41f1-45b4-a919-c57b18870117" providerId="ADAL" clId="{EB3AAB68-1C81-4FAA-9471-49551CB4A501}" dt="2026-06-26T08:40:48.007" v="345" actId="26606"/>
+            <ac:spMkLst>
+              <pc:docMk/>
+              <pc:sldMasterMk cId="3034982234" sldId="2147483746"/>
+              <pc:sldLayoutMk cId="811860513" sldId="2147483732"/>
+              <ac:spMk id="8" creationId="{D01080F2-251A-4B88-9A62-16F46D724F83}"/>
+            </ac:spMkLst>
+          </pc:spChg>
+        </pc:sldLayoutChg>
+        <pc:sldLayoutChg chg="modSp mod ord">
+          <pc:chgData name="De Giorgi, Giuseppe" userId="2bed3bf2-41f1-45b4-a919-c57b18870117" providerId="ADAL" clId="{EB3AAB68-1C81-4FAA-9471-49551CB4A501}" dt="2026-06-26T08:40:48.007" v="345" actId="26606"/>
+          <pc:sldLayoutMkLst>
+            <pc:docMk/>
+            <pc:sldMasterMk cId="3034982234" sldId="2147483746"/>
+            <pc:sldLayoutMk cId="2001422672" sldId="2147483733"/>
+          </pc:sldLayoutMkLst>
+          <pc:spChg chg="mod">
+            <ac:chgData name="De Giorgi, Giuseppe" userId="2bed3bf2-41f1-45b4-a919-c57b18870117" providerId="ADAL" clId="{EB3AAB68-1C81-4FAA-9471-49551CB4A501}" dt="2026-06-26T08:40:48.007" v="345" actId="26606"/>
+            <ac:spMkLst>
+              <pc:docMk/>
+              <pc:sldMasterMk cId="3034982234" sldId="2147483746"/>
+              <pc:sldLayoutMk cId="2001422672" sldId="2147483733"/>
+              <ac:spMk id="2" creationId="{94E9223F-721F-47BF-9FD5-0F8D12FF0DE1}"/>
+            </ac:spMkLst>
+          </pc:spChg>
+          <pc:spChg chg="mod">
+            <ac:chgData name="De Giorgi, Giuseppe" userId="2bed3bf2-41f1-45b4-a919-c57b18870117" providerId="ADAL" clId="{EB3AAB68-1C81-4FAA-9471-49551CB4A501}" dt="2026-06-26T08:40:48.007" v="345" actId="26606"/>
+            <ac:spMkLst>
+              <pc:docMk/>
+              <pc:sldMasterMk cId="3034982234" sldId="2147483746"/>
+              <pc:sldLayoutMk cId="2001422672" sldId="2147483733"/>
+              <ac:spMk id="3" creationId="{05915714-6BBA-4593-8591-4E26F7D58D9F}"/>
+            </ac:spMkLst>
+          </pc:spChg>
+          <pc:spChg chg="mod">
+            <ac:chgData name="De Giorgi, Giuseppe" userId="2bed3bf2-41f1-45b4-a919-c57b18870117" providerId="ADAL" clId="{EB3AAB68-1C81-4FAA-9471-49551CB4A501}" dt="2026-06-26T08:40:48.007" v="345" actId="26606"/>
+            <ac:spMkLst>
+              <pc:docMk/>
+              <pc:sldMasterMk cId="3034982234" sldId="2147483746"/>
+              <pc:sldLayoutMk cId="2001422672" sldId="2147483733"/>
+              <ac:spMk id="4" creationId="{BE06F857-D2E1-44DD-ABDD-EBB739645B67}"/>
+            </ac:spMkLst>
+          </pc:spChg>
+        </pc:sldLayoutChg>
+        <pc:sldLayoutChg chg="modSp mod ord">
+          <pc:chgData name="De Giorgi, Giuseppe" userId="2bed3bf2-41f1-45b4-a919-c57b18870117" providerId="ADAL" clId="{EB3AAB68-1C81-4FAA-9471-49551CB4A501}" dt="2026-06-26T08:40:48.007" v="345" actId="26606"/>
+          <pc:sldLayoutMkLst>
+            <pc:docMk/>
+            <pc:sldMasterMk cId="3034982234" sldId="2147483746"/>
+            <pc:sldLayoutMk cId="1933282235" sldId="2147483734"/>
+          </pc:sldLayoutMkLst>
+          <pc:spChg chg="mod">
+            <ac:chgData name="De Giorgi, Giuseppe" userId="2bed3bf2-41f1-45b4-a919-c57b18870117" providerId="ADAL" clId="{EB3AAB68-1C81-4FAA-9471-49551CB4A501}" dt="2026-06-26T08:40:48.007" v="345" actId="26606"/>
+            <ac:spMkLst>
+              <pc:docMk/>
+              <pc:sldMasterMk cId="3034982234" sldId="2147483746"/>
+              <pc:sldLayoutMk cId="1933282235" sldId="2147483734"/>
+              <ac:spMk id="2" creationId="{00000000-0000-0000-0000-000000000000}"/>
+            </ac:spMkLst>
+          </pc:spChg>
+          <pc:spChg chg="mod">
+            <ac:chgData name="De Giorgi, Giuseppe" userId="2bed3bf2-41f1-45b4-a919-c57b18870117" providerId="ADAL" clId="{EB3AAB68-1C81-4FAA-9471-49551CB4A501}" dt="2026-06-26T08:40:48.007" v="345" actId="26606"/>
+            <ac:spMkLst>
+              <pc:docMk/>
+              <pc:sldMasterMk cId="3034982234" sldId="2147483746"/>
+              <pc:sldLayoutMk cId="1933282235" sldId="2147483734"/>
+              <ac:spMk id="3" creationId="{00000000-0000-0000-0000-000000000000}"/>
+            </ac:spMkLst>
+          </pc:spChg>
+          <pc:spChg chg="mod">
+            <ac:chgData name="De Giorgi, Giuseppe" userId="2bed3bf2-41f1-45b4-a919-c57b18870117" providerId="ADAL" clId="{EB3AAB68-1C81-4FAA-9471-49551CB4A501}" dt="2026-06-26T08:40:48.007" v="345" actId="26606"/>
+            <ac:spMkLst>
+              <pc:docMk/>
+              <pc:sldMasterMk cId="3034982234" sldId="2147483746"/>
+              <pc:sldLayoutMk cId="1933282235" sldId="2147483734"/>
+              <ac:spMk id="4" creationId="{00000000-0000-0000-0000-000000000000}"/>
+            </ac:spMkLst>
+          </pc:spChg>
+          <pc:spChg chg="mod">
+            <ac:chgData name="De Giorgi, Giuseppe" userId="2bed3bf2-41f1-45b4-a919-c57b18870117" providerId="ADAL" clId="{EB3AAB68-1C81-4FAA-9471-49551CB4A501}" dt="2026-06-26T08:40:48.007" v="345" actId="26606"/>
+            <ac:spMkLst>
+              <pc:docMk/>
+              <pc:sldMasterMk cId="3034982234" sldId="2147483746"/>
+              <pc:sldLayoutMk cId="1933282235" sldId="2147483734"/>
+              <ac:spMk id="5" creationId="{00000000-0000-0000-0000-000000000000}"/>
+            </ac:spMkLst>
+          </pc:spChg>
+          <pc:spChg chg="mod">
+            <ac:chgData name="De Giorgi, Giuseppe" userId="2bed3bf2-41f1-45b4-a919-c57b18870117" providerId="ADAL" clId="{EB3AAB68-1C81-4FAA-9471-49551CB4A501}" dt="2026-06-26T08:40:48.007" v="345" actId="26606"/>
+            <ac:spMkLst>
+              <pc:docMk/>
+              <pc:sldMasterMk cId="3034982234" sldId="2147483746"/>
+              <pc:sldLayoutMk cId="1933282235" sldId="2147483734"/>
+              <ac:spMk id="6" creationId="{00000000-0000-0000-0000-000000000000}"/>
+            </ac:spMkLst>
+          </pc:spChg>
+          <pc:spChg chg="mod">
+            <ac:chgData name="De Giorgi, Giuseppe" userId="2bed3bf2-41f1-45b4-a919-c57b18870117" providerId="ADAL" clId="{EB3AAB68-1C81-4FAA-9471-49551CB4A501}" dt="2026-06-26T08:40:48.007" v="345" actId="26606"/>
+            <ac:spMkLst>
+              <pc:docMk/>
+              <pc:sldMasterMk cId="3034982234" sldId="2147483746"/>
+              <pc:sldLayoutMk cId="1933282235" sldId="2147483734"/>
+              <ac:spMk id="7" creationId="{00000000-0000-0000-0000-000000000000}"/>
+            </ac:spMkLst>
+          </pc:spChg>
+        </pc:sldLayoutChg>
+        <pc:sldLayoutChg chg="modSp mod ord">
+          <pc:chgData name="De Giorgi, Giuseppe" userId="2bed3bf2-41f1-45b4-a919-c57b18870117" providerId="ADAL" clId="{EB3AAB68-1C81-4FAA-9471-49551CB4A501}" dt="2026-06-26T08:40:48.007" v="345" actId="26606"/>
+          <pc:sldLayoutMkLst>
+            <pc:docMk/>
+            <pc:sldMasterMk cId="3034982234" sldId="2147483746"/>
+            <pc:sldLayoutMk cId="523267730" sldId="2147483735"/>
+          </pc:sldLayoutMkLst>
+          <pc:spChg chg="mod">
+            <ac:chgData name="De Giorgi, Giuseppe" userId="2bed3bf2-41f1-45b4-a919-c57b18870117" providerId="ADAL" clId="{EB3AAB68-1C81-4FAA-9471-49551CB4A501}" dt="2026-06-26T08:40:48.007" v="345" actId="26606"/>
+            <ac:spMkLst>
+              <pc:docMk/>
+              <pc:sldMasterMk cId="3034982234" sldId="2147483746"/>
+              <pc:sldLayoutMk cId="523267730" sldId="2147483735"/>
+              <ac:spMk id="2" creationId="{00000000-0000-0000-0000-000000000000}"/>
+            </ac:spMkLst>
+          </pc:spChg>
+          <pc:spChg chg="mod">
+            <ac:chgData name="De Giorgi, Giuseppe" userId="2bed3bf2-41f1-45b4-a919-c57b18870117" providerId="ADAL" clId="{EB3AAB68-1C81-4FAA-9471-49551CB4A501}" dt="2026-06-26T08:40:48.007" v="345" actId="26606"/>
+            <ac:spMkLst>
+              <pc:docMk/>
+              <pc:sldMasterMk cId="3034982234" sldId="2147483746"/>
+              <pc:sldLayoutMk cId="523267730" sldId="2147483735"/>
+              <ac:spMk id="3" creationId="{00000000-0000-0000-0000-000000000000}"/>
+            </ac:spMkLst>
+          </pc:spChg>
+          <pc:spChg chg="mod">
+            <ac:chgData name="De Giorgi, Giuseppe" userId="2bed3bf2-41f1-45b4-a919-c57b18870117" providerId="ADAL" clId="{EB3AAB68-1C81-4FAA-9471-49551CB4A501}" dt="2026-06-26T08:40:48.007" v="345" actId="26606"/>
+            <ac:spMkLst>
+              <pc:docMk/>
+              <pc:sldMasterMk cId="3034982234" sldId="2147483746"/>
+              <pc:sldLayoutMk cId="523267730" sldId="2147483735"/>
+              <ac:spMk id="4" creationId="{00000000-0000-0000-0000-000000000000}"/>
+            </ac:spMkLst>
+          </pc:spChg>
+          <pc:spChg chg="mod">
+            <ac:chgData name="De Giorgi, Giuseppe" userId="2bed3bf2-41f1-45b4-a919-c57b18870117" providerId="ADAL" clId="{EB3AAB68-1C81-4FAA-9471-49551CB4A501}" dt="2026-06-26T08:40:48.007" v="345" actId="26606"/>
+            <ac:spMkLst>
+              <pc:docMk/>
+              <pc:sldMasterMk cId="3034982234" sldId="2147483746"/>
+              <pc:sldLayoutMk cId="523267730" sldId="2147483735"/>
+              <ac:spMk id="5" creationId="{00000000-0000-0000-0000-000000000000}"/>
+            </ac:spMkLst>
+          </pc:spChg>
+          <pc:spChg chg="mod">
+            <ac:chgData name="De Giorgi, Giuseppe" userId="2bed3bf2-41f1-45b4-a919-c57b18870117" providerId="ADAL" clId="{EB3AAB68-1C81-4FAA-9471-49551CB4A501}" dt="2026-06-26T08:40:48.007" v="345" actId="26606"/>
+            <ac:spMkLst>
+              <pc:docMk/>
+              <pc:sldMasterMk cId="3034982234" sldId="2147483746"/>
+              <pc:sldLayoutMk cId="523267730" sldId="2147483735"/>
+              <ac:spMk id="6" creationId="{00000000-0000-0000-0000-000000000000}"/>
+            </ac:spMkLst>
+          </pc:spChg>
+          <pc:spChg chg="mod">
+            <ac:chgData name="De Giorgi, Giuseppe" userId="2bed3bf2-41f1-45b4-a919-c57b18870117" providerId="ADAL" clId="{EB3AAB68-1C81-4FAA-9471-49551CB4A501}" dt="2026-06-26T08:40:48.007" v="345" actId="26606"/>
+            <ac:spMkLst>
+              <pc:docMk/>
+              <pc:sldMasterMk cId="3034982234" sldId="2147483746"/>
+              <pc:sldLayoutMk cId="523267730" sldId="2147483735"/>
+              <ac:spMk id="7" creationId="{00000000-0000-0000-0000-000000000000}"/>
+            </ac:spMkLst>
+          </pc:spChg>
+        </pc:sldLayoutChg>
+        <pc:sldLayoutChg chg="modSp mod ord">
+          <pc:chgData name="De Giorgi, Giuseppe" userId="2bed3bf2-41f1-45b4-a919-c57b18870117" providerId="ADAL" clId="{EB3AAB68-1C81-4FAA-9471-49551CB4A501}" dt="2026-06-26T08:40:48.007" v="345" actId="26606"/>
+          <pc:sldLayoutMkLst>
+            <pc:docMk/>
+            <pc:sldMasterMk cId="3034982234" sldId="2147483746"/>
+            <pc:sldLayoutMk cId="1672269861" sldId="2147483736"/>
+          </pc:sldLayoutMkLst>
+          <pc:spChg chg="mod">
+            <ac:chgData name="De Giorgi, Giuseppe" userId="2bed3bf2-41f1-45b4-a919-c57b18870117" providerId="ADAL" clId="{EB3AAB68-1C81-4FAA-9471-49551CB4A501}" dt="2026-06-26T08:40:48.007" v="345" actId="26606"/>
+            <ac:spMkLst>
+              <pc:docMk/>
+              <pc:sldMasterMk cId="3034982234" sldId="2147483746"/>
+              <pc:sldLayoutMk cId="1672269861" sldId="2147483736"/>
+              <ac:spMk id="2" creationId="{00000000-0000-0000-0000-000000000000}"/>
+            </ac:spMkLst>
+          </pc:spChg>
+          <pc:spChg chg="mod">
+            <ac:chgData name="De Giorgi, Giuseppe" userId="2bed3bf2-41f1-45b4-a919-c57b18870117" providerId="ADAL" clId="{EB3AAB68-1C81-4FAA-9471-49551CB4A501}" dt="2026-06-26T08:40:48.007" v="345" actId="26606"/>
+            <ac:spMkLst>
+              <pc:docMk/>
+              <pc:sldMasterMk cId="3034982234" sldId="2147483746"/>
+              <pc:sldLayoutMk cId="1672269861" sldId="2147483736"/>
+              <ac:spMk id="3" creationId="{00000000-0000-0000-0000-000000000000}"/>
+            </ac:spMkLst>
+          </pc:spChg>
+          <pc:spChg chg="mod">
+            <ac:chgData name="De Giorgi, Giuseppe" userId="2bed3bf2-41f1-45b4-a919-c57b18870117" providerId="ADAL" clId="{EB3AAB68-1C81-4FAA-9471-49551CB4A501}" dt="2026-06-26T08:40:48.007" v="345" actId="26606"/>
+            <ac:spMkLst>
+              <pc:docMk/>
+              <pc:sldMasterMk cId="3034982234" sldId="2147483746"/>
+              <pc:sldLayoutMk cId="1672269861" sldId="2147483736"/>
+              <ac:spMk id="7" creationId="{7D5506EE-1026-4F35-9ACC-BD05BE0F9B36}"/>
+            </ac:spMkLst>
+          </pc:spChg>
+          <pc:spChg chg="mod">
+            <ac:chgData name="De Giorgi, Giuseppe" userId="2bed3bf2-41f1-45b4-a919-c57b18870117" providerId="ADAL" clId="{EB3AAB68-1C81-4FAA-9471-49551CB4A501}" dt="2026-06-26T08:40:48.007" v="345" actId="26606"/>
+            <ac:spMkLst>
+              <pc:docMk/>
+              <pc:sldMasterMk cId="3034982234" sldId="2147483746"/>
+              <pc:sldLayoutMk cId="1672269861" sldId="2147483736"/>
+              <ac:spMk id="8" creationId="{B7696E5F-8D95-4450-AE52-5438E6EDE2BF}"/>
+            </ac:spMkLst>
+          </pc:spChg>
+          <pc:spChg chg="mod">
+            <ac:chgData name="De Giorgi, Giuseppe" userId="2bed3bf2-41f1-45b4-a919-c57b18870117" providerId="ADAL" clId="{EB3AAB68-1C81-4FAA-9471-49551CB4A501}" dt="2026-06-26T08:40:48.007" v="345" actId="26606"/>
+            <ac:spMkLst>
+              <pc:docMk/>
+              <pc:sldMasterMk cId="3034982234" sldId="2147483746"/>
+              <pc:sldLayoutMk cId="1672269861" sldId="2147483736"/>
+              <ac:spMk id="9" creationId="{999B2253-74CC-409E-BEB0-F8EFCFCB5629}"/>
+            </ac:spMkLst>
+          </pc:spChg>
+        </pc:sldLayoutChg>
+        <pc:sldLayoutChg chg="modSp mod ord">
+          <pc:chgData name="De Giorgi, Giuseppe" userId="2bed3bf2-41f1-45b4-a919-c57b18870117" providerId="ADAL" clId="{EB3AAB68-1C81-4FAA-9471-49551CB4A501}" dt="2026-06-26T08:40:48.007" v="345" actId="26606"/>
+          <pc:sldLayoutMkLst>
+            <pc:docMk/>
+            <pc:sldMasterMk cId="3034982234" sldId="2147483746"/>
+            <pc:sldLayoutMk cId="761827292" sldId="2147483737"/>
+          </pc:sldLayoutMkLst>
+          <pc:spChg chg="mod">
+            <ac:chgData name="De Giorgi, Giuseppe" userId="2bed3bf2-41f1-45b4-a919-c57b18870117" providerId="ADAL" clId="{EB3AAB68-1C81-4FAA-9471-49551CB4A501}" dt="2026-06-26T08:40:48.007" v="345" actId="26606"/>
+            <ac:spMkLst>
+              <pc:docMk/>
+              <pc:sldMasterMk cId="3034982234" sldId="2147483746"/>
+              <pc:sldLayoutMk cId="761827292" sldId="2147483737"/>
+              <ac:spMk id="2" creationId="{00000000-0000-0000-0000-000000000000}"/>
+            </ac:spMkLst>
+          </pc:spChg>
+          <pc:spChg chg="mod">
+            <ac:chgData name="De Giorgi, Giuseppe" userId="2bed3bf2-41f1-45b4-a919-c57b18870117" providerId="ADAL" clId="{EB3AAB68-1C81-4FAA-9471-49551CB4A501}" dt="2026-06-26T08:40:48.007" v="345" actId="26606"/>
+            <ac:spMkLst>
+              <pc:docMk/>
+              <pc:sldMasterMk cId="3034982234" sldId="2147483746"/>
+              <pc:sldLayoutMk cId="761827292" sldId="2147483737"/>
+              <ac:spMk id="3" creationId="{00000000-0000-0000-0000-000000000000}"/>
+            </ac:spMkLst>
+          </pc:spChg>
+          <pc:spChg chg="mod">
+            <ac:chgData name="De Giorgi, Giuseppe" userId="2bed3bf2-41f1-45b4-a919-c57b18870117" providerId="ADAL" clId="{EB3AAB68-1C81-4FAA-9471-49551CB4A501}" dt="2026-06-26T08:40:48.007" v="345" actId="26606"/>
+            <ac:spMkLst>
+              <pc:docMk/>
+              <pc:sldMasterMk cId="3034982234" sldId="2147483746"/>
+              <pc:sldLayoutMk cId="761827292" sldId="2147483737"/>
+              <ac:spMk id="7" creationId="{AF33D6B0-F070-45C4-A472-19F432BE3932}"/>
+            </ac:spMkLst>
+          </pc:spChg>
+          <pc:spChg chg="mod">
+            <ac:chgData name="De Giorgi, Giuseppe" userId="2bed3bf2-41f1-45b4-a919-c57b18870117" providerId="ADAL" clId="{EB3AAB68-1C81-4FAA-9471-49551CB4A501}" dt="2026-06-26T08:40:48.007" v="345" actId="26606"/>
+            <ac:spMkLst>
+              <pc:docMk/>
+              <pc:sldMasterMk cId="3034982234" sldId="2147483746"/>
+              <pc:sldLayoutMk cId="761827292" sldId="2147483737"/>
+              <ac:spMk id="8" creationId="{9975399F-DAB2-410D-967F-ED17E6F796E7}"/>
+            </ac:spMkLst>
+          </pc:spChg>
+          <pc:spChg chg="mod">
+            <ac:chgData name="De Giorgi, Giuseppe" userId="2bed3bf2-41f1-45b4-a919-c57b18870117" providerId="ADAL" clId="{EB3AAB68-1C81-4FAA-9471-49551CB4A501}" dt="2026-06-26T08:40:48.007" v="345" actId="26606"/>
+            <ac:spMkLst>
+              <pc:docMk/>
+              <pc:sldMasterMk cId="3034982234" sldId="2147483746"/>
+              <pc:sldLayoutMk cId="761827292" sldId="2147483737"/>
+              <ac:spMk id="10" creationId="{F762A46F-6BE5-4D12-9412-5CA7672EA8EC}"/>
+            </ac:spMkLst>
+          </pc:spChg>
+        </pc:sldLayoutChg>
+        <pc:sldLayoutChg chg="modSp mod ord">
+          <pc:chgData name="De Giorgi, Giuseppe" userId="2bed3bf2-41f1-45b4-a919-c57b18870117" providerId="ADAL" clId="{EB3AAB68-1C81-4FAA-9471-49551CB4A501}" dt="2026-06-26T08:40:48.007" v="345" actId="26606"/>
+          <pc:sldLayoutMkLst>
+            <pc:docMk/>
+            <pc:sldMasterMk cId="3034982234" sldId="2147483746"/>
+            <pc:sldLayoutMk cId="3068194699" sldId="2147483738"/>
+          </pc:sldLayoutMkLst>
+          <pc:spChg chg="mod">
+            <ac:chgData name="De Giorgi, Giuseppe" userId="2bed3bf2-41f1-45b4-a919-c57b18870117" providerId="ADAL" clId="{EB3AAB68-1C81-4FAA-9471-49551CB4A501}" dt="2026-06-26T08:40:48.007" v="345" actId="26606"/>
+            <ac:spMkLst>
+              <pc:docMk/>
+              <pc:sldMasterMk cId="3034982234" sldId="2147483746"/>
+              <pc:sldLayoutMk cId="3068194699" sldId="2147483738"/>
+              <ac:spMk id="2" creationId="{8AF8A515-AA94-45D1-9223-5C2272618D85}"/>
+            </ac:spMkLst>
+          </pc:spChg>
+          <pc:spChg chg="mod">
+            <ac:chgData name="De Giorgi, Giuseppe" userId="2bed3bf2-41f1-45b4-a919-c57b18870117" providerId="ADAL" clId="{EB3AAB68-1C81-4FAA-9471-49551CB4A501}" dt="2026-06-26T08:40:48.007" v="345" actId="26606"/>
+            <ac:spMkLst>
+              <pc:docMk/>
+              <pc:sldMasterMk cId="3034982234" sldId="2147483746"/>
+              <pc:sldLayoutMk cId="3068194699" sldId="2147483738"/>
+              <ac:spMk id="3" creationId="{00000000-0000-0000-0000-000000000000}"/>
+            </ac:spMkLst>
+          </pc:spChg>
+          <pc:spChg chg="mod">
+            <ac:chgData name="De Giorgi, Giuseppe" userId="2bed3bf2-41f1-45b4-a919-c57b18870117" providerId="ADAL" clId="{EB3AAB68-1C81-4FAA-9471-49551CB4A501}" dt="2026-06-26T08:40:48.007" v="345" actId="26606"/>
+            <ac:spMkLst>
+              <pc:docMk/>
+              <pc:sldMasterMk cId="3034982234" sldId="2147483746"/>
+              <pc:sldLayoutMk cId="3068194699" sldId="2147483738"/>
+              <ac:spMk id="4" creationId="{00000000-0000-0000-0000-000000000000}"/>
+            </ac:spMkLst>
+          </pc:spChg>
+          <pc:spChg chg="mod">
+            <ac:chgData name="De Giorgi, Giuseppe" userId="2bed3bf2-41f1-45b4-a919-c57b18870117" providerId="ADAL" clId="{EB3AAB68-1C81-4FAA-9471-49551CB4A501}" dt="2026-06-26T08:40:48.007" v="345" actId="26606"/>
+            <ac:spMkLst>
+              <pc:docMk/>
+              <pc:sldMasterMk cId="3034982234" sldId="2147483746"/>
+              <pc:sldLayoutMk cId="3068194699" sldId="2147483738"/>
+              <ac:spMk id="5" creationId="{00000000-0000-0000-0000-000000000000}"/>
+            </ac:spMkLst>
+          </pc:spChg>
+          <pc:spChg chg="mod">
+            <ac:chgData name="De Giorgi, Giuseppe" userId="2bed3bf2-41f1-45b4-a919-c57b18870117" providerId="ADAL" clId="{EB3AAB68-1C81-4FAA-9471-49551CB4A501}" dt="2026-06-26T08:40:48.007" v="345" actId="26606"/>
+            <ac:spMkLst>
+              <pc:docMk/>
+              <pc:sldMasterMk cId="3034982234" sldId="2147483746"/>
+              <pc:sldLayoutMk cId="3068194699" sldId="2147483738"/>
+              <ac:spMk id="6" creationId="{00000000-0000-0000-0000-000000000000}"/>
+            </ac:spMkLst>
+          </pc:spChg>
+          <pc:spChg chg="mod">
+            <ac:chgData name="De Giorgi, Giuseppe" userId="2bed3bf2-41f1-45b4-a919-c57b18870117" providerId="ADAL" clId="{EB3AAB68-1C81-4FAA-9471-49551CB4A501}" dt="2026-06-26T08:40:48.007" v="345" actId="26606"/>
+            <ac:spMkLst>
+              <pc:docMk/>
+              <pc:sldMasterMk cId="3034982234" sldId="2147483746"/>
+              <pc:sldLayoutMk cId="3068194699" sldId="2147483738"/>
+              <ac:spMk id="10" creationId="{00000000-0000-0000-0000-000000000000}"/>
+            </ac:spMkLst>
+          </pc:spChg>
+          <pc:spChg chg="mod">
+            <ac:chgData name="De Giorgi, Giuseppe" userId="2bed3bf2-41f1-45b4-a919-c57b18870117" providerId="ADAL" clId="{EB3AAB68-1C81-4FAA-9471-49551CB4A501}" dt="2026-06-26T08:40:48.007" v="345" actId="26606"/>
+            <ac:spMkLst>
+              <pc:docMk/>
+              <pc:sldMasterMk cId="3034982234" sldId="2147483746"/>
+              <pc:sldLayoutMk cId="3068194699" sldId="2147483738"/>
+              <ac:spMk id="11" creationId="{D052F5BC-98E0-4D60-AD67-9547738B7DD4}"/>
+            </ac:spMkLst>
+          </pc:spChg>
+          <pc:spChg chg="mod">
+            <ac:chgData name="De Giorgi, Giuseppe" userId="2bed3bf2-41f1-45b4-a919-c57b18870117" providerId="ADAL" clId="{EB3AAB68-1C81-4FAA-9471-49551CB4A501}" dt="2026-06-26T08:40:48.007" v="345" actId="26606"/>
+            <ac:spMkLst>
+              <pc:docMk/>
+              <pc:sldMasterMk cId="3034982234" sldId="2147483746"/>
+              <pc:sldLayoutMk cId="3068194699" sldId="2147483738"/>
+              <ac:spMk id="12" creationId="{A38552DC-952E-41EA-AAAF-C2187523C0B0}"/>
+            </ac:spMkLst>
+          </pc:spChg>
+        </pc:sldLayoutChg>
+        <pc:sldLayoutChg chg="modSp mod ord">
+          <pc:chgData name="De Giorgi, Giuseppe" userId="2bed3bf2-41f1-45b4-a919-c57b18870117" providerId="ADAL" clId="{EB3AAB68-1C81-4FAA-9471-49551CB4A501}" dt="2026-06-26T08:40:48.007" v="345" actId="26606"/>
+          <pc:sldLayoutMkLst>
+            <pc:docMk/>
+            <pc:sldMasterMk cId="3034982234" sldId="2147483746"/>
+            <pc:sldLayoutMk cId="4256663047" sldId="2147483743"/>
+          </pc:sldLayoutMkLst>
+          <pc:spChg chg="mod">
+            <ac:chgData name="De Giorgi, Giuseppe" userId="2bed3bf2-41f1-45b4-a919-c57b18870117" providerId="ADAL" clId="{EB3AAB68-1C81-4FAA-9471-49551CB4A501}" dt="2026-06-26T08:40:48.007" v="345" actId="26606"/>
+            <ac:spMkLst>
+              <pc:docMk/>
+              <pc:sldMasterMk cId="3034982234" sldId="2147483746"/>
+              <pc:sldLayoutMk cId="4256663047" sldId="2147483743"/>
+              <ac:spMk id="2" creationId="{5782D47D-B0DC-4C40-BCC6-BBBA32584A38}"/>
+            </ac:spMkLst>
+          </pc:spChg>
+          <pc:spChg chg="mod">
+            <ac:chgData name="De Giorgi, Giuseppe" userId="2bed3bf2-41f1-45b4-a919-c57b18870117" providerId="ADAL" clId="{EB3AAB68-1C81-4FAA-9471-49551CB4A501}" dt="2026-06-26T08:40:48.007" v="345" actId="26606"/>
+            <ac:spMkLst>
+              <pc:docMk/>
+              <pc:sldMasterMk cId="3034982234" sldId="2147483746"/>
+              <pc:sldLayoutMk cId="4256663047" sldId="2147483743"/>
+              <ac:spMk id="3" creationId="{00000000-0000-0000-0000-000000000000}"/>
+            </ac:spMkLst>
+          </pc:spChg>
+          <pc:spChg chg="mod">
+            <ac:chgData name="De Giorgi, Giuseppe" userId="2bed3bf2-41f1-45b4-a919-c57b18870117" providerId="ADAL" clId="{EB3AAB68-1C81-4FAA-9471-49551CB4A501}" dt="2026-06-26T08:40:48.007" v="345" actId="26606"/>
+            <ac:spMkLst>
+              <pc:docMk/>
+              <pc:sldMasterMk cId="3034982234" sldId="2147483746"/>
+              <pc:sldLayoutMk cId="4256663047" sldId="2147483743"/>
+              <ac:spMk id="4" creationId="{00000000-0000-0000-0000-000000000000}"/>
+            </ac:spMkLst>
+          </pc:spChg>
+          <pc:spChg chg="mod">
+            <ac:chgData name="De Giorgi, Giuseppe" userId="2bed3bf2-41f1-45b4-a919-c57b18870117" providerId="ADAL" clId="{EB3AAB68-1C81-4FAA-9471-49551CB4A501}" dt="2026-06-26T08:40:48.007" v="345" actId="26606"/>
+            <ac:spMkLst>
+              <pc:docMk/>
+              <pc:sldMasterMk cId="3034982234" sldId="2147483746"/>
+              <pc:sldLayoutMk cId="4256663047" sldId="2147483743"/>
+              <ac:spMk id="8" creationId="{00000000-0000-0000-0000-000000000000}"/>
+            </ac:spMkLst>
+          </pc:spChg>
+          <pc:spChg chg="mod">
+            <ac:chgData name="De Giorgi, Giuseppe" userId="2bed3bf2-41f1-45b4-a919-c57b18870117" providerId="ADAL" clId="{EB3AAB68-1C81-4FAA-9471-49551CB4A501}" dt="2026-06-26T08:40:48.007" v="345" actId="26606"/>
+            <ac:spMkLst>
+              <pc:docMk/>
+              <pc:sldMasterMk cId="3034982234" sldId="2147483746"/>
+              <pc:sldLayoutMk cId="4256663047" sldId="2147483743"/>
+              <ac:spMk id="9" creationId="{4690D34E-7EBD-44B2-83CA-4C126A18D7EF}"/>
+            </ac:spMkLst>
+          </pc:spChg>
+          <pc:spChg chg="mod">
+            <ac:chgData name="De Giorgi, Giuseppe" userId="2bed3bf2-41f1-45b4-a919-c57b18870117" providerId="ADAL" clId="{EB3AAB68-1C81-4FAA-9471-49551CB4A501}" dt="2026-06-26T08:40:48.007" v="345" actId="26606"/>
+            <ac:spMkLst>
+              <pc:docMk/>
+              <pc:sldMasterMk cId="3034982234" sldId="2147483746"/>
+              <pc:sldLayoutMk cId="4256663047" sldId="2147483743"/>
+              <ac:spMk id="10" creationId="{2AC511A1-9BBD-42DE-92FB-2AF44F8E97A9}"/>
+            </ac:spMkLst>
+          </pc:spChg>
+        </pc:sldLayoutChg>
+        <pc:sldLayoutChg chg="modSp mod ord">
+          <pc:chgData name="De Giorgi, Giuseppe" userId="2bed3bf2-41f1-45b4-a919-c57b18870117" providerId="ADAL" clId="{EB3AAB68-1C81-4FAA-9471-49551CB4A501}" dt="2026-06-26T08:40:48.007" v="345" actId="26606"/>
+          <pc:sldLayoutMkLst>
+            <pc:docMk/>
+            <pc:sldMasterMk cId="3034982234" sldId="2147483746"/>
+            <pc:sldLayoutMk cId="3304162564" sldId="2147483747"/>
+          </pc:sldLayoutMkLst>
+          <pc:spChg chg="mod">
+            <ac:chgData name="De Giorgi, Giuseppe" userId="2bed3bf2-41f1-45b4-a919-c57b18870117" providerId="ADAL" clId="{EB3AAB68-1C81-4FAA-9471-49551CB4A501}" dt="2026-06-26T08:40:48.007" v="345" actId="26606"/>
+            <ac:spMkLst>
+              <pc:docMk/>
+              <pc:sldMasterMk cId="3034982234" sldId="2147483746"/>
+              <pc:sldLayoutMk cId="3304162564" sldId="2147483747"/>
+              <ac:spMk id="2" creationId="{00000000-0000-0000-0000-000000000000}"/>
+            </ac:spMkLst>
+          </pc:spChg>
+          <pc:spChg chg="mod">
+            <ac:chgData name="De Giorgi, Giuseppe" userId="2bed3bf2-41f1-45b4-a919-c57b18870117" providerId="ADAL" clId="{EB3AAB68-1C81-4FAA-9471-49551CB4A501}" dt="2026-06-26T08:40:48.007" v="345" actId="26606"/>
+            <ac:spMkLst>
+              <pc:docMk/>
+              <pc:sldMasterMk cId="3034982234" sldId="2147483746"/>
+              <pc:sldLayoutMk cId="3304162564" sldId="2147483747"/>
+              <ac:spMk id="3" creationId="{00000000-0000-0000-0000-000000000000}"/>
+            </ac:spMkLst>
+          </pc:spChg>
+          <pc:spChg chg="mod">
+            <ac:chgData name="De Giorgi, Giuseppe" userId="2bed3bf2-41f1-45b4-a919-c57b18870117" providerId="ADAL" clId="{EB3AAB68-1C81-4FAA-9471-49551CB4A501}" dt="2026-06-26T08:40:48.007" v="345" actId="26606"/>
+            <ac:spMkLst>
+              <pc:docMk/>
+              <pc:sldMasterMk cId="3034982234" sldId="2147483746"/>
+              <pc:sldLayoutMk cId="3304162564" sldId="2147483747"/>
+              <ac:spMk id="7" creationId="{AAF2E137-EC28-48F8-9198-1F02539029B6}"/>
+            </ac:spMkLst>
+          </pc:spChg>
+          <pc:spChg chg="mod">
+            <ac:chgData name="De Giorgi, Giuseppe" userId="2bed3bf2-41f1-45b4-a919-c57b18870117" providerId="ADAL" clId="{EB3AAB68-1C81-4FAA-9471-49551CB4A501}" dt="2026-06-26T08:40:48.007" v="345" actId="26606"/>
+            <ac:spMkLst>
+              <pc:docMk/>
+              <pc:sldMasterMk cId="3034982234" sldId="2147483746"/>
+              <pc:sldLayoutMk cId="3304162564" sldId="2147483747"/>
+              <ac:spMk id="8" creationId="{189422CD-6F62-4DD6-89EF-07A60B42D219}"/>
+            </ac:spMkLst>
+          </pc:spChg>
+          <pc:spChg chg="mod">
+            <ac:chgData name="De Giorgi, Giuseppe" userId="2bed3bf2-41f1-45b4-a919-c57b18870117" providerId="ADAL" clId="{EB3AAB68-1C81-4FAA-9471-49551CB4A501}" dt="2026-06-26T08:40:48.007" v="345" actId="26606"/>
+            <ac:spMkLst>
+              <pc:docMk/>
+              <pc:sldMasterMk cId="3034982234" sldId="2147483746"/>
+              <pc:sldLayoutMk cId="3304162564" sldId="2147483747"/>
+              <ac:spMk id="11" creationId="{69C6AFF8-42B4-4D05-969B-9F5FB3355555}"/>
+            </ac:spMkLst>
+          </pc:spChg>
+        </pc:sldLayoutChg>
+        <pc:sldLayoutChg chg="modSp mod ord">
+          <pc:chgData name="De Giorgi, Giuseppe" userId="2bed3bf2-41f1-45b4-a919-c57b18870117" providerId="ADAL" clId="{EB3AAB68-1C81-4FAA-9471-49551CB4A501}" dt="2026-06-26T08:40:48.007" v="345" actId="26606"/>
+          <pc:sldLayoutMkLst>
+            <pc:docMk/>
+            <pc:sldMasterMk cId="3034982234" sldId="2147483746"/>
+            <pc:sldLayoutMk cId="4258331492" sldId="2147483748"/>
+          </pc:sldLayoutMkLst>
+          <pc:spChg chg="mod">
+            <ac:chgData name="De Giorgi, Giuseppe" userId="2bed3bf2-41f1-45b4-a919-c57b18870117" providerId="ADAL" clId="{EB3AAB68-1C81-4FAA-9471-49551CB4A501}" dt="2026-06-26T08:40:48.007" v="345" actId="26606"/>
+            <ac:spMkLst>
+              <pc:docMk/>
+              <pc:sldMasterMk cId="3034982234" sldId="2147483746"/>
+              <pc:sldLayoutMk cId="4258331492" sldId="2147483748"/>
+              <ac:spMk id="2" creationId="{00000000-0000-0000-0000-000000000000}"/>
+            </ac:spMkLst>
+          </pc:spChg>
+          <pc:spChg chg="mod">
+            <ac:chgData name="De Giorgi, Giuseppe" userId="2bed3bf2-41f1-45b4-a919-c57b18870117" providerId="ADAL" clId="{EB3AAB68-1C81-4FAA-9471-49551CB4A501}" dt="2026-06-26T08:40:48.007" v="345" actId="26606"/>
+            <ac:spMkLst>
+              <pc:docMk/>
+              <pc:sldMasterMk cId="3034982234" sldId="2147483746"/>
+              <pc:sldLayoutMk cId="4258331492" sldId="2147483748"/>
+              <ac:spMk id="3" creationId="{00000000-0000-0000-0000-000000000000}"/>
+            </ac:spMkLst>
+          </pc:spChg>
+          <pc:spChg chg="mod">
+            <ac:chgData name="De Giorgi, Giuseppe" userId="2bed3bf2-41f1-45b4-a919-c57b18870117" providerId="ADAL" clId="{EB3AAB68-1C81-4FAA-9471-49551CB4A501}" dt="2026-06-26T08:40:48.007" v="345" actId="26606"/>
+            <ac:spMkLst>
+              <pc:docMk/>
+              <pc:sldMasterMk cId="3034982234" sldId="2147483746"/>
+              <pc:sldLayoutMk cId="4258331492" sldId="2147483748"/>
+              <ac:spMk id="4" creationId="{9925CCF1-92C0-4AF3-BFAF-4921631915AB}"/>
+            </ac:spMkLst>
+          </pc:spChg>
+          <pc:spChg chg="mod">
+            <ac:chgData name="De Giorgi, Giuseppe" userId="2bed3bf2-41f1-45b4-a919-c57b18870117" providerId="ADAL" clId="{EB3AAB68-1C81-4FAA-9471-49551CB4A501}" dt="2026-06-26T08:40:48.007" v="345" actId="26606"/>
+            <ac:spMkLst>
+              <pc:docMk/>
+              <pc:sldMasterMk cId="3034982234" sldId="2147483746"/>
+              <pc:sldLayoutMk cId="4258331492" sldId="2147483748"/>
+              <ac:spMk id="5" creationId="{051A78A9-3DFF-4937-A9F2-5D8CF495F367}"/>
+            </ac:spMkLst>
+          </pc:spChg>
+          <pc:spChg chg="mod">
+            <ac:chgData name="De Giorgi, Giuseppe" userId="2bed3bf2-41f1-45b4-a919-c57b18870117" providerId="ADAL" clId="{EB3AAB68-1C81-4FAA-9471-49551CB4A501}" dt="2026-06-26T08:40:48.007" v="345" actId="26606"/>
+            <ac:spMkLst>
+              <pc:docMk/>
+              <pc:sldMasterMk cId="3034982234" sldId="2147483746"/>
+              <pc:sldLayoutMk cId="4258331492" sldId="2147483748"/>
+              <ac:spMk id="6" creationId="{5FAEB271-5CC0-4759-BC6E-8BE53AB227C0}"/>
+            </ac:spMkLst>
+          </pc:spChg>
+        </pc:sldLayoutChg>
+        <pc:sldLayoutChg chg="modSp mod ord">
+          <pc:chgData name="De Giorgi, Giuseppe" userId="2bed3bf2-41f1-45b4-a919-c57b18870117" providerId="ADAL" clId="{EB3AAB68-1C81-4FAA-9471-49551CB4A501}" dt="2026-06-26T08:40:48.007" v="345" actId="26606"/>
+          <pc:sldLayoutMkLst>
+            <pc:docMk/>
+            <pc:sldMasterMk cId="3034982234" sldId="2147483746"/>
+            <pc:sldLayoutMk cId="892670607" sldId="2147483749"/>
+          </pc:sldLayoutMkLst>
+          <pc:spChg chg="mod">
+            <ac:chgData name="De Giorgi, Giuseppe" userId="2bed3bf2-41f1-45b4-a919-c57b18870117" providerId="ADAL" clId="{EB3AAB68-1C81-4FAA-9471-49551CB4A501}" dt="2026-06-26T08:40:48.007" v="345" actId="26606"/>
+            <ac:spMkLst>
+              <pc:docMk/>
+              <pc:sldMasterMk cId="3034982234" sldId="2147483746"/>
+              <pc:sldLayoutMk cId="892670607" sldId="2147483749"/>
+              <ac:spMk id="2" creationId="{00000000-0000-0000-0000-000000000000}"/>
+            </ac:spMkLst>
+          </pc:spChg>
+          <pc:spChg chg="mod">
+            <ac:chgData name="De Giorgi, Giuseppe" userId="2bed3bf2-41f1-45b4-a919-c57b18870117" providerId="ADAL" clId="{EB3AAB68-1C81-4FAA-9471-49551CB4A501}" dt="2026-06-26T08:40:48.007" v="345" actId="26606"/>
+            <ac:spMkLst>
+              <pc:docMk/>
+              <pc:sldMasterMk cId="3034982234" sldId="2147483746"/>
+              <pc:sldLayoutMk cId="892670607" sldId="2147483749"/>
+              <ac:spMk id="3" creationId="{00000000-0000-0000-0000-000000000000}"/>
+            </ac:spMkLst>
+          </pc:spChg>
+          <pc:spChg chg="mod">
+            <ac:chgData name="De Giorgi, Giuseppe" userId="2bed3bf2-41f1-45b4-a919-c57b18870117" providerId="ADAL" clId="{EB3AAB68-1C81-4FAA-9471-49551CB4A501}" dt="2026-06-26T08:40:48.007" v="345" actId="26606"/>
+            <ac:spMkLst>
+              <pc:docMk/>
+              <pc:sldMasterMk cId="3034982234" sldId="2147483746"/>
+              <pc:sldLayoutMk cId="892670607" sldId="2147483749"/>
+              <ac:spMk id="7" creationId="{354D8B55-9EA8-4B81-8E84-9B93B0A27559}"/>
+            </ac:spMkLst>
+          </pc:spChg>
+          <pc:spChg chg="mod">
+            <ac:chgData name="De Giorgi, Giuseppe" userId="2bed3bf2-41f1-45b4-a919-c57b18870117" providerId="ADAL" clId="{EB3AAB68-1C81-4FAA-9471-49551CB4A501}" dt="2026-06-26T08:40:48.007" v="345" actId="26606"/>
+            <ac:spMkLst>
+              <pc:docMk/>
+              <pc:sldMasterMk cId="3034982234" sldId="2147483746"/>
+              <pc:sldLayoutMk cId="892670607" sldId="2147483749"/>
+              <ac:spMk id="8" creationId="{062CA021-2578-47CB-822C-BDDFF7223B28}"/>
+            </ac:spMkLst>
+          </pc:spChg>
+          <pc:spChg chg="mod">
+            <ac:chgData name="De Giorgi, Giuseppe" userId="2bed3bf2-41f1-45b4-a919-c57b18870117" providerId="ADAL" clId="{EB3AAB68-1C81-4FAA-9471-49551CB4A501}" dt="2026-06-26T08:40:48.007" v="345" actId="26606"/>
+            <ac:spMkLst>
+              <pc:docMk/>
+              <pc:sldMasterMk cId="3034982234" sldId="2147483746"/>
+              <pc:sldLayoutMk cId="892670607" sldId="2147483749"/>
+              <ac:spMk id="9" creationId="{C4AAB51D-4141-4682-9375-DAFD5FB9DD10}"/>
+            </ac:spMkLst>
+          </pc:spChg>
+        </pc:sldLayoutChg>
+      </pc:sldMasterChg>
+      <pc:sldMasterChg chg="del replId sldLayoutOrd">
+        <pc:chgData name="De Giorgi, Giuseppe" userId="2bed3bf2-41f1-45b4-a919-c57b18870117" providerId="ADAL" clId="{EB3AAB68-1C81-4FAA-9471-49551CB4A501}" dt="2026-06-26T08:40:48.007" v="345" actId="26606"/>
+        <pc:sldMasterMkLst>
+          <pc:docMk/>
+          <pc:sldMasterMk cId="3034982234" sldId="2147483750"/>
+        </pc:sldMasterMkLst>
+      </pc:sldMasterChg>
     </pc:docChg>
   </pc:docChgLst>
 </pc:chgInfo>
@@ -5085,10 +5986,10 @@
           <a:p>
             <a:pPr rtl="0"/>
             <a:r>
-              <a:rPr lang="it" dirty="0"/>
+              <a:rPr lang="it"/>
               <a:t>Fare clic per modificare lo stile del titolo dello schema</a:t>
             </a:r>
-            <a:endParaRPr lang="en-US" dirty="0"/>
+            <a:endParaRPr lang="en-US"/>
           </a:p>
         </p:txBody>
       </p:sp>
@@ -5150,7 +6051,7 @@
               <a:rPr lang="it"/>
               <a:t>Quinto livello</a:t>
             </a:r>
-            <a:endParaRPr lang="en-US" dirty="0"/>
+            <a:endParaRPr lang="en-US"/>
           </a:p>
         </p:txBody>
       </p:sp>
@@ -5190,7 +6091,7 @@
               <a:rPr lang="it-IT" smtClean="0"/>
               <a:t>26/06/2026</a:t>
             </a:fld>
-            <a:endParaRPr lang="en-US" dirty="0"/>
+            <a:endParaRPr lang="en-US"/>
           </a:p>
         </p:txBody>
       </p:sp>
@@ -5226,7 +6127,7 @@
           </a:lstStyle>
           <a:p>
             <a:pPr rtl="0"/>
-            <a:endParaRPr lang="en-US" dirty="0"/>
+            <a:endParaRPr lang="en-US"/>
           </a:p>
         </p:txBody>
       </p:sp>
@@ -5266,7 +6167,7 @@
               <a:rPr lang="en-US" smtClean="0"/>
               <a:t>‹#›</a:t>
             </a:fld>
-            <a:endParaRPr lang="en-US" dirty="0"/>
+            <a:endParaRPr lang="en-US"/>
           </a:p>
         </p:txBody>
       </p:sp>
@@ -5335,7 +6236,7 @@
     <p:sldLayoutId id="2147483736" r:id="rId10"/>
     <p:sldLayoutId id="2147483737" r:id="rId11"/>
   </p:sldLayoutIdLst>
-  <p:hf sldNum="0" hdr="0" ftr="0"/>
+  <p:hf hdr="0" ftr="0"/>
   <p:txStyles>
     <p:titleStyle>
       <a:lvl1pPr algn="l" defTabSz="914400" rtl="0" eaLnBrk="1" latinLnBrk="0" hangingPunct="1">
@@ -6003,6 +6904,38 @@
           </a:fontRef>
         </p:style>
       </p:cxnSp>
+      <p:sp>
+        <p:nvSpPr>
+          <p:cNvPr id="9001" name="Slide Number Placeholder"/>
+          <p:cNvSpPr>
+            <a:spLocks noGrp="1"/>
+          </p:cNvSpPr>
+          <p:nvPr>
+            <p:ph type="sldNum" sz="quarter" idx="12"/>
+          </p:nvPr>
+        </p:nvSpPr>
+        <p:spPr/>
+        <p:txBody>
+          <a:bodyPr/>
+          <a:lstStyle/>
+          <a:p>
+            <a:pPr rtl="0"/>
+            <a:fld id="{B448F773-45DB-46F2-89C5-E7A7B37910D3}" type="slidenum">
+              <a:rPr lang="it-IT" smtClean="0">
+                <a:solidFill>
+                  <a:schemeClr val="tx2"/>
+                </a:solidFill>
+              </a:rPr>
+              <a:t>1</a:t>
+            </a:fld>
+            <a:endParaRPr lang="it-IT">
+              <a:solidFill>
+                <a:schemeClr val="tx2"/>
+              </a:solidFill>
+            </a:endParaRPr>
+          </a:p>
+        </p:txBody>
+      </p:sp>
     </p:spTree>
     <p:extLst>
       <p:ext uri="{BB962C8B-B14F-4D97-AF65-F5344CB8AC3E}">
@@ -6389,18 +7322,12 @@
       </p:sp>
       <p:sp>
         <p:nvSpPr>
-          <p:cNvPr id="4" name="Date Placeholder 3">
-            <a:extLst>
-              <a:ext uri="{FF2B5EF4-FFF2-40B4-BE49-F238E27FC236}">
-                <a16:creationId xmlns:a16="http://schemas.microsoft.com/office/drawing/2014/main" id="{442F80AC-F994-FCA6-F3E5-539FB789E8E8}"/>
-              </a:ext>
-            </a:extLst>
-          </p:cNvPr>
+          <p:cNvPr id="9001" name="Slide Number Placeholder"/>
           <p:cNvSpPr>
             <a:spLocks noGrp="1"/>
           </p:cNvSpPr>
           <p:nvPr>
-            <p:ph type="dt" sz="half" idx="10"/>
+            <p:ph type="sldNum" sz="quarter" idx="12"/>
           </p:nvPr>
         </p:nvSpPr>
         <p:spPr/>
@@ -6409,11 +7336,11 @@
           <a:lstStyle/>
           <a:p>
             <a:pPr rtl="0"/>
-            <a:fld id="{925069C4-336E-40F0-85A2-25D6F0A25D32}" type="datetime1">
+            <a:fld id="{62B802EC-43DF-46F5-A25D-D857931DD7C4}" type="slidenum">
               <a:rPr lang="it-IT" smtClean="0"/>
-              <a:t>26/06/2026</a:t>
+              <a:t>10</a:t>
             </a:fld>
-            <a:endParaRPr lang="en-US"/>
+            <a:endParaRPr lang="it-IT"/>
           </a:p>
         </p:txBody>
       </p:sp>
@@ -6554,6 +7481,30 @@
           </a:p>
         </p:txBody>
       </p:sp>
+      <p:sp>
+        <p:nvSpPr>
+          <p:cNvPr id="9001" name="Slide Number Placeholder"/>
+          <p:cNvSpPr>
+            <a:spLocks noGrp="1"/>
+          </p:cNvSpPr>
+          <p:nvPr>
+            <p:ph type="sldNum" sz="quarter" idx="12"/>
+          </p:nvPr>
+        </p:nvSpPr>
+        <p:spPr/>
+        <p:txBody>
+          <a:bodyPr/>
+          <a:lstStyle/>
+          <a:p>
+            <a:pPr rtl="0"/>
+            <a:fld id="{8BDF903E-F2CF-42F0-B408-0E92DEE930E9}" type="slidenum">
+              <a:rPr lang="it-IT" smtClean="0"/>
+              <a:t>11</a:t>
+            </a:fld>
+            <a:endParaRPr lang="it-IT"/>
+          </a:p>
+        </p:txBody>
+      </p:sp>
     </p:spTree>
     <p:extLst>
       <p:ext uri="{BB962C8B-B14F-4D97-AF65-F5344CB8AC3E}">
@@ -6920,6 +7871,30 @@
           </a:p>
         </p:txBody>
       </p:sp>
+      <p:sp>
+        <p:nvSpPr>
+          <p:cNvPr id="9001" name="Slide Number Placeholder"/>
+          <p:cNvSpPr>
+            <a:spLocks noGrp="1"/>
+          </p:cNvSpPr>
+          <p:nvPr>
+            <p:ph type="sldNum" sz="quarter" idx="12"/>
+          </p:nvPr>
+        </p:nvSpPr>
+        <p:spPr/>
+        <p:txBody>
+          <a:bodyPr/>
+          <a:lstStyle/>
+          <a:p>
+            <a:pPr rtl="0"/>
+            <a:fld id="{8104837E-759F-48AA-81C5-511140F89BBF}" type="slidenum">
+              <a:rPr lang="it-IT" smtClean="0"/>
+              <a:t>12</a:t>
+            </a:fld>
+            <a:endParaRPr lang="it-IT"/>
+          </a:p>
+        </p:txBody>
+      </p:sp>
     </p:spTree>
     <p:extLst>
       <p:ext uri="{BB962C8B-B14F-4D97-AF65-F5344CB8AC3E}">
@@ -7088,6 +8063,30 @@
           </a:p>
         </p:txBody>
       </p:sp>
+      <p:sp>
+        <p:nvSpPr>
+          <p:cNvPr id="9001" name="Slide Number Placeholder"/>
+          <p:cNvSpPr>
+            <a:spLocks noGrp="1"/>
+          </p:cNvSpPr>
+          <p:nvPr>
+            <p:ph type="sldNum" sz="quarter" idx="12"/>
+          </p:nvPr>
+        </p:nvSpPr>
+        <p:spPr/>
+        <p:txBody>
+          <a:bodyPr/>
+          <a:lstStyle/>
+          <a:p>
+            <a:pPr rtl="0"/>
+            <a:fld id="{0DF73FA1-BFB9-4291-8AA3-3C1A8EF88AC0}" type="slidenum">
+              <a:rPr lang="it-IT" smtClean="0"/>
+              <a:t>13</a:t>
+            </a:fld>
+            <a:endParaRPr lang="it-IT"/>
+          </a:p>
+        </p:txBody>
+      </p:sp>
     </p:spTree>
     <p:extLst>
       <p:ext uri="{BB962C8B-B14F-4D97-AF65-F5344CB8AC3E}">
@@ -7470,6 +8469,30 @@
           </a:p>
         </p:txBody>
       </p:sp>
+      <p:sp>
+        <p:nvSpPr>
+          <p:cNvPr id="9001" name="Slide Number Placeholder"/>
+          <p:cNvSpPr>
+            <a:spLocks noGrp="1"/>
+          </p:cNvSpPr>
+          <p:nvPr>
+            <p:ph type="sldNum" sz="quarter" idx="12"/>
+          </p:nvPr>
+        </p:nvSpPr>
+        <p:spPr/>
+        <p:txBody>
+          <a:bodyPr/>
+          <a:lstStyle/>
+          <a:p>
+            <a:pPr rtl="0"/>
+            <a:fld id="{D440628C-C59C-4769-9B26-9BCDFE864D4F}" type="slidenum">
+              <a:rPr lang="it-IT" smtClean="0"/>
+              <a:t>14</a:t>
+            </a:fld>
+            <a:endParaRPr lang="it-IT"/>
+          </a:p>
+        </p:txBody>
+      </p:sp>
     </p:spTree>
     <p:extLst>
       <p:ext uri="{BB962C8B-B14F-4D97-AF65-F5344CB8AC3E}">
@@ -7597,30 +8620,6 @@
       </p:pic>
       <p:sp>
         <p:nvSpPr>
-          <p:cNvPr id="4" name="Date Placeholder 3"/>
-          <p:cNvSpPr>
-            <a:spLocks noGrp="1"/>
-          </p:cNvSpPr>
-          <p:nvPr>
-            <p:ph type="dt" sz="half" idx="10"/>
-          </p:nvPr>
-        </p:nvSpPr>
-        <p:spPr/>
-        <p:txBody>
-          <a:bodyPr/>
-          <a:lstStyle/>
-          <a:p>
-            <a:pPr rtl="0"/>
-            <a:fld id="{925069C4-336E-40F0-85A2-25D6F0A25D32}" type="datetime1">
-              <a:rPr lang="it-IT" smtClean="0"/>
-              <a:t>26/06/2026</a:t>
-            </a:fld>
-            <a:endParaRPr lang="en-US"/>
-          </a:p>
-        </p:txBody>
-      </p:sp>
-      <p:sp>
-        <p:nvSpPr>
           <p:cNvPr id="20" name="Description"/>
           <p:cNvSpPr txBox="1"/>
           <p:nvPr/>
@@ -7738,6 +8737,30 @@
               </a:rPr>
               <a:t>setup.py e queries.py risiedono nella cartella grafo/python.</a:t>
             </a:r>
+          </a:p>
+        </p:txBody>
+      </p:sp>
+      <p:sp>
+        <p:nvSpPr>
+          <p:cNvPr id="9001" name="Slide Number Placeholder"/>
+          <p:cNvSpPr>
+            <a:spLocks noGrp="1"/>
+          </p:cNvSpPr>
+          <p:nvPr>
+            <p:ph type="sldNum" sz="quarter" idx="12"/>
+          </p:nvPr>
+        </p:nvSpPr>
+        <p:spPr/>
+        <p:txBody>
+          <a:bodyPr/>
+          <a:lstStyle/>
+          <a:p>
+            <a:pPr rtl="0"/>
+            <a:fld id="{4F691B45-C863-44E4-B23A-CB0F91830035}" type="slidenum">
+              <a:rPr lang="it-IT" smtClean="0"/>
+              <a:t>15</a:t>
+            </a:fld>
+            <a:endParaRPr lang="it-IT"/>
           </a:p>
         </p:txBody>
       </p:sp>
@@ -8217,18 +9240,12 @@
       </p:sp>
       <p:sp>
         <p:nvSpPr>
-          <p:cNvPr id="4" name="Date Placeholder 3">
-            <a:extLst>
-              <a:ext uri="{FF2B5EF4-FFF2-40B4-BE49-F238E27FC236}">
-                <a16:creationId xmlns:a16="http://schemas.microsoft.com/office/drawing/2014/main" id="{3DBE7ABC-976E-7AF6-1271-204B59B9B30F}"/>
-              </a:ext>
-            </a:extLst>
-          </p:cNvPr>
+          <p:cNvPr id="9001" name="Slide Number Placeholder"/>
           <p:cNvSpPr>
             <a:spLocks noGrp="1"/>
           </p:cNvSpPr>
           <p:nvPr>
-            <p:ph type="dt" sz="half" idx="10"/>
+            <p:ph type="sldNum" sz="quarter" idx="12"/>
           </p:nvPr>
         </p:nvSpPr>
         <p:spPr/>
@@ -8237,11 +9254,11 @@
           <a:lstStyle/>
           <a:p>
             <a:pPr rtl="0"/>
-            <a:fld id="{925069C4-336E-40F0-85A2-25D6F0A25D32}" type="datetime1">
+            <a:fld id="{766C3F43-AC18-4A5C-AE79-0FEC45B436D7}" type="slidenum">
               <a:rPr lang="it-IT" smtClean="0"/>
-              <a:t>26/06/2026</a:t>
+              <a:t>16</a:t>
             </a:fld>
-            <a:endParaRPr lang="en-US" dirty="0"/>
+            <a:endParaRPr lang="it-IT"/>
           </a:p>
         </p:txBody>
       </p:sp>
@@ -8351,36 +9368,6 @@
           </a:p>
         </p:txBody>
       </p:sp>
-      <p:sp>
-        <p:nvSpPr>
-          <p:cNvPr id="5" name="Date Placeholder 4">
-            <a:extLst>
-              <a:ext uri="{FF2B5EF4-FFF2-40B4-BE49-F238E27FC236}">
-                <a16:creationId xmlns:a16="http://schemas.microsoft.com/office/drawing/2014/main" id="{163A3365-3442-D4D6-C8C1-B0FF9B293539}"/>
-              </a:ext>
-            </a:extLst>
-          </p:cNvPr>
-          <p:cNvSpPr>
-            <a:spLocks noGrp="1"/>
-          </p:cNvSpPr>
-          <p:nvPr>
-            <p:ph type="dt" sz="half" idx="10"/>
-          </p:nvPr>
-        </p:nvSpPr>
-        <p:spPr/>
-        <p:txBody>
-          <a:bodyPr/>
-          <a:lstStyle/>
-          <a:p>
-            <a:pPr rtl="0"/>
-            <a:fld id="{4F4D0FD0-762A-4E00-B40D-E1022DE9149C}" type="datetime1">
-              <a:rPr lang="it-IT" smtClean="0"/>
-              <a:t>26/06/2026</a:t>
-            </a:fld>
-            <a:endParaRPr lang="en-US" dirty="0"/>
-          </a:p>
-        </p:txBody>
-      </p:sp>
       <p:pic>
         <p:nvPicPr>
           <p:cNvPr id="9" name="Picture 8">
@@ -8417,6 +9404,30 @@
           </a:prstGeom>
         </p:spPr>
       </p:pic>
+      <p:sp>
+        <p:nvSpPr>
+          <p:cNvPr id="9001" name="Slide Number Placeholder"/>
+          <p:cNvSpPr>
+            <a:spLocks noGrp="1"/>
+          </p:cNvSpPr>
+          <p:nvPr>
+            <p:ph type="sldNum" sz="quarter" idx="12"/>
+          </p:nvPr>
+        </p:nvSpPr>
+        <p:spPr/>
+        <p:txBody>
+          <a:bodyPr/>
+          <a:lstStyle/>
+          <a:p>
+            <a:pPr rtl="0"/>
+            <a:fld id="{09C5F244-2851-465E-B81C-A28AFD2DC7A0}" type="slidenum">
+              <a:rPr lang="it-IT" smtClean="0"/>
+              <a:t>17</a:t>
+            </a:fld>
+            <a:endParaRPr lang="it-IT"/>
+          </a:p>
+        </p:txBody>
+      </p:sp>
     </p:spTree>
     <p:extLst>
       <p:ext uri="{BB962C8B-B14F-4D97-AF65-F5344CB8AC3E}">
@@ -8480,52 +9491,6 @@
           </a:p>
         </p:txBody>
       </p:sp>
-      <p:sp>
-        <p:nvSpPr>
-          <p:cNvPr id="2" name="Date Placeholder 1">
-            <a:extLst>
-              <a:ext uri="{FF2B5EF4-FFF2-40B4-BE49-F238E27FC236}">
-                <a16:creationId xmlns:a16="http://schemas.microsoft.com/office/drawing/2014/main" id="{B508F369-5CA8-DE82-EBD9-F05758826B9D}"/>
-              </a:ext>
-            </a:extLst>
-          </p:cNvPr>
-          <p:cNvSpPr>
-            <a:spLocks noGrp="1"/>
-          </p:cNvSpPr>
-          <p:nvPr>
-            <p:ph type="dt" sz="half" idx="10"/>
-          </p:nvPr>
-        </p:nvSpPr>
-        <p:spPr>
-          <a:xfrm>
-            <a:off x="8218426" y="6446838"/>
-            <a:ext cx="2584850" cy="365125"/>
-          </a:xfrm>
-        </p:spPr>
-        <p:txBody>
-          <a:bodyPr anchor="ctr">
-            <a:normAutofit/>
-          </a:bodyPr>
-          <a:lstStyle/>
-          <a:p>
-            <a:pPr rtl="0">
-              <a:spcAft>
-                <a:spcPts val="600"/>
-              </a:spcAft>
-            </a:pPr>
-            <a:fld id="{0984158B-E18A-4760-AF0B-F8E1F54F95E6}" type="datetime1">
-              <a:rPr lang="it-IT" smtClean="0"/>
-              <a:pPr rtl="0">
-                <a:spcAft>
-                  <a:spcPts val="600"/>
-                </a:spcAft>
-              </a:pPr>
-              <a:t>26/06/2026</a:t>
-            </a:fld>
-            <a:endParaRPr lang="en-US"/>
-          </a:p>
-        </p:txBody>
-      </p:sp>
       <p:pic>
         <p:nvPicPr>
           <p:cNvPr id="4" name="Picture 3">
@@ -8769,6 +9734,30 @@
               </a:rPr>
               <a:t>Crea l'indice e carica i dati nel database</a:t>
             </a:r>
+          </a:p>
+        </p:txBody>
+      </p:sp>
+      <p:sp>
+        <p:nvSpPr>
+          <p:cNvPr id="9001" name="Slide Number Placeholder"/>
+          <p:cNvSpPr>
+            <a:spLocks noGrp="1"/>
+          </p:cNvSpPr>
+          <p:nvPr>
+            <p:ph type="sldNum" sz="quarter" idx="12"/>
+          </p:nvPr>
+        </p:nvSpPr>
+        <p:spPr/>
+        <p:txBody>
+          <a:bodyPr/>
+          <a:lstStyle/>
+          <a:p>
+            <a:pPr rtl="0"/>
+            <a:fld id="{919D218B-55AD-45E0-9627-67F5283F68F8}" type="slidenum">
+              <a:rPr lang="it-IT" smtClean="0"/>
+              <a:t>18</a:t>
+            </a:fld>
+            <a:endParaRPr lang="it-IT"/>
           </a:p>
         </p:txBody>
       </p:sp>
@@ -8935,36 +9924,6 @@
           </a:prstGeom>
         </p:spPr>
       </p:pic>
-      <p:sp>
-        <p:nvSpPr>
-          <p:cNvPr id="4" name="Date Placeholder 3">
-            <a:extLst>
-              <a:ext uri="{FF2B5EF4-FFF2-40B4-BE49-F238E27FC236}">
-                <a16:creationId xmlns:a16="http://schemas.microsoft.com/office/drawing/2014/main" id="{F36EF665-89F7-695C-0291-F3C97F5F8D82}"/>
-              </a:ext>
-            </a:extLst>
-          </p:cNvPr>
-          <p:cNvSpPr>
-            <a:spLocks noGrp="1"/>
-          </p:cNvSpPr>
-          <p:nvPr>
-            <p:ph type="dt" sz="half" idx="10"/>
-          </p:nvPr>
-        </p:nvSpPr>
-        <p:spPr/>
-        <p:txBody>
-          <a:bodyPr/>
-          <a:lstStyle/>
-          <a:p>
-            <a:pPr rtl="0"/>
-            <a:fld id="{925069C4-336E-40F0-85A2-25D6F0A25D32}" type="datetime1">
-              <a:rPr lang="it-IT" smtClean="0"/>
-              <a:t>26/06/2026</a:t>
-            </a:fld>
-            <a:endParaRPr lang="en-US" dirty="0"/>
-          </a:p>
-        </p:txBody>
-      </p:sp>
       <p:pic>
         <p:nvPicPr>
           <p:cNvPr id="8" name="Picture 7">
@@ -8995,6 +9954,30 @@
           </a:prstGeom>
         </p:spPr>
       </p:pic>
+      <p:sp>
+        <p:nvSpPr>
+          <p:cNvPr id="9001" name="Slide Number Placeholder"/>
+          <p:cNvSpPr>
+            <a:spLocks noGrp="1"/>
+          </p:cNvSpPr>
+          <p:nvPr>
+            <p:ph type="sldNum" sz="quarter" idx="12"/>
+          </p:nvPr>
+        </p:nvSpPr>
+        <p:spPr/>
+        <p:txBody>
+          <a:bodyPr/>
+          <a:lstStyle/>
+          <a:p>
+            <a:pPr rtl="0"/>
+            <a:fld id="{D194705B-870B-42AB-919F-E8EE5635157B}" type="slidenum">
+              <a:rPr lang="it-IT" smtClean="0"/>
+              <a:t>19</a:t>
+            </a:fld>
+            <a:endParaRPr lang="it-IT"/>
+          </a:p>
+        </p:txBody>
+      </p:sp>
     </p:spTree>
     <p:extLst>
       <p:ext uri="{BB962C8B-B14F-4D97-AF65-F5344CB8AC3E}">
@@ -9469,18 +10452,12 @@
       </p:sp>
       <p:sp>
         <p:nvSpPr>
-          <p:cNvPr id="4" name="Date Placeholder 3">
-            <a:extLst>
-              <a:ext uri="{FF2B5EF4-FFF2-40B4-BE49-F238E27FC236}">
-                <a16:creationId xmlns:a16="http://schemas.microsoft.com/office/drawing/2014/main" id="{DCC9EBD1-C824-9E55-76C3-3CF415962A6D}"/>
-              </a:ext>
-            </a:extLst>
-          </p:cNvPr>
+          <p:cNvPr id="9001" name="Slide Number Placeholder"/>
           <p:cNvSpPr>
             <a:spLocks noGrp="1"/>
           </p:cNvSpPr>
           <p:nvPr>
-            <p:ph type="dt" sz="half" idx="10"/>
+            <p:ph type="sldNum" sz="quarter" idx="12"/>
           </p:nvPr>
         </p:nvSpPr>
         <p:spPr/>
@@ -9489,11 +10466,11 @@
           <a:lstStyle/>
           <a:p>
             <a:pPr rtl="0"/>
-            <a:fld id="{925069C4-336E-40F0-85A2-25D6F0A25D32}" type="datetime1">
+            <a:fld id="{EC0DD001-3247-4B0B-8A4F-482155020F26}" type="slidenum">
               <a:rPr lang="it-IT" smtClean="0"/>
-              <a:t>26/06/2026</a:t>
+              <a:t>2</a:t>
             </a:fld>
-            <a:endParaRPr lang="en-US" dirty="0"/>
+            <a:endParaRPr lang="it-IT"/>
           </a:p>
         </p:txBody>
       </p:sp>
@@ -9556,7 +10533,7 @@
           <a:lstStyle/>
           <a:p>
             <a:r>
-              <a:rPr lang="it-IT" sz="2400"/>
+              <a:rPr lang="it-IT" sz="2400" dirty="0"/>
               <a:t>Avvio dell'Ambiente con Docker Compose</a:t>
             </a:r>
           </a:p>
@@ -9594,36 +10571,6 @@
           </a:prstGeom>
         </p:spPr>
       </p:pic>
-      <p:sp>
-        <p:nvSpPr>
-          <p:cNvPr id="4" name="Date Placeholder 3">
-            <a:extLst>
-              <a:ext uri="{FF2B5EF4-FFF2-40B4-BE49-F238E27FC236}">
-                <a16:creationId xmlns:a16="http://schemas.microsoft.com/office/drawing/2014/main" id="{1CEAF708-0640-3FFD-C51B-9171CC8ACA01}"/>
-              </a:ext>
-            </a:extLst>
-          </p:cNvPr>
-          <p:cNvSpPr>
-            <a:spLocks noGrp="1"/>
-          </p:cNvSpPr>
-          <p:nvPr>
-            <p:ph type="dt" sz="half" idx="10"/>
-          </p:nvPr>
-        </p:nvSpPr>
-        <p:spPr/>
-        <p:txBody>
-          <a:bodyPr/>
-          <a:lstStyle/>
-          <a:p>
-            <a:pPr rtl="0"/>
-            <a:fld id="{925069C4-336E-40F0-85A2-25D6F0A25D32}" type="datetime1">
-              <a:rPr lang="it-IT" smtClean="0"/>
-              <a:t>26/06/2026</a:t>
-            </a:fld>
-            <a:endParaRPr lang="en-US" dirty="0"/>
-          </a:p>
-        </p:txBody>
-      </p:sp>
       <p:pic>
         <p:nvPicPr>
           <p:cNvPr id="6" name="Picture 5">
@@ -9677,7 +10624,7 @@
           <a:lstStyle/>
           <a:p>
             <a:r>
-              <a:rPr lang="it-IT" sz="1200">
+              <a:rPr lang="it-IT" sz="1200" dirty="0">
                 <a:solidFill>
                   <a:srgbClr val="000000"/>
                 </a:solidFill>
@@ -9685,7 +10632,7 @@
               <a:t>Un unico file </a:t>
             </a:r>
             <a:r>
-              <a:rPr lang="it-IT" sz="1200" b="1">
+              <a:rPr lang="it-IT" sz="1200" b="1" dirty="0" err="1">
                 <a:solidFill>
                   <a:srgbClr val="4A5356"/>
                 </a:solidFill>
@@ -9693,12 +10640,60 @@
               <a:t>docker-compose.yml</a:t>
             </a:r>
             <a:r>
-              <a:rPr lang="it-IT" sz="1200">
+              <a:rPr lang="it-IT" sz="1200" dirty="0">
                 <a:solidFill>
                   <a:srgbClr val="000000"/>
                 </a:solidFill>
               </a:rPr>
-              <a:t> definisce e avvia tre container: Neo4j, Elasticsearch e Kibana, quest'ultimo per la visualizzazione dei dati del database key-document.</a:t>
+              <a:t> definisce e avvia tre container: Neo4j, </a:t>
+            </a:r>
+            <a:r>
+              <a:rPr lang="it-IT" sz="1200" dirty="0" err="1">
+                <a:solidFill>
+                  <a:srgbClr val="000000"/>
+                </a:solidFill>
+              </a:rPr>
+              <a:t>Elasticsearch</a:t>
+            </a:r>
+            <a:r>
+              <a:rPr lang="it-IT" sz="1200" dirty="0">
+                <a:solidFill>
+                  <a:srgbClr val="000000"/>
+                </a:solidFill>
+              </a:rPr>
+              <a:t> e </a:t>
+            </a:r>
+            <a:r>
+              <a:rPr lang="it-IT" sz="1200" dirty="0" err="1">
+                <a:solidFill>
+                  <a:srgbClr val="000000"/>
+                </a:solidFill>
+              </a:rPr>
+              <a:t>Kibana</a:t>
+            </a:r>
+            <a:r>
+              <a:rPr lang="it-IT" sz="1200" dirty="0">
+                <a:solidFill>
+                  <a:srgbClr val="000000"/>
+                </a:solidFill>
+              </a:rPr>
+              <a:t>, quest'ultimo per la visualizzazione dei dati del </a:t>
+            </a:r>
+            <a:r>
+              <a:rPr lang="it-IT" sz="1200" dirty="0" err="1">
+                <a:solidFill>
+                  <a:srgbClr val="000000"/>
+                </a:solidFill>
+              </a:rPr>
+              <a:t>document</a:t>
+            </a:r>
+            <a:r>
+              <a:rPr lang="it-IT" sz="1200" dirty="0">
+                <a:solidFill>
+                  <a:srgbClr val="000000"/>
+                </a:solidFill>
+              </a:rPr>
+              <a:t> database.</a:t>
             </a:r>
           </a:p>
           <a:p>
@@ -9708,15 +10703,23 @@
               </a:spcBef>
             </a:pPr>
             <a:r>
-              <a:rPr lang="it-IT" sz="1200" b="1">
+              <a:rPr lang="it-IT" sz="1200" b="1" dirty="0" err="1">
                 <a:solidFill>
                   <a:srgbClr val="4A5356"/>
                 </a:solidFill>
               </a:rPr>
-              <a:t>docker compose up — </a:t>
-            </a:r>
-            <a:r>
-              <a:rPr lang="it-IT" sz="1200">
+              <a:t>docker</a:t>
+            </a:r>
+            <a:r>
+              <a:rPr lang="it-IT" sz="1200" b="1" dirty="0">
+                <a:solidFill>
+                  <a:srgbClr val="4A5356"/>
+                </a:solidFill>
+              </a:rPr>
+              <a:t> compose up — </a:t>
+            </a:r>
+            <a:r>
+              <a:rPr lang="it-IT" sz="1200" dirty="0">
                 <a:solidFill>
                   <a:srgbClr val="000000"/>
                 </a:solidFill>
@@ -9724,21 +10727,85 @@
               <a:t>costruisce e avvia i tre servizi. </a:t>
             </a:r>
             <a:r>
-              <a:rPr lang="it-IT" sz="1200" b="1">
+              <a:rPr lang="it-IT" sz="1200" b="1" dirty="0" err="1">
                 <a:solidFill>
                   <a:srgbClr val="4A5356"/>
                 </a:solidFill>
               </a:rPr>
-              <a:t>docker ps — </a:t>
-            </a:r>
-            <a:r>
-              <a:rPr lang="it-IT" sz="1200">
+              <a:t>docker</a:t>
+            </a:r>
+            <a:r>
+              <a:rPr lang="it-IT" sz="1200" b="1" dirty="0">
+                <a:solidFill>
+                  <a:srgbClr val="4A5356"/>
+                </a:solidFill>
+              </a:rPr>
+              <a:t> </a:t>
+            </a:r>
+            <a:r>
+              <a:rPr lang="it-IT" sz="1200" b="1" dirty="0" err="1">
+                <a:solidFill>
+                  <a:srgbClr val="4A5356"/>
+                </a:solidFill>
+              </a:rPr>
+              <a:t>ps</a:t>
+            </a:r>
+            <a:r>
+              <a:rPr lang="it-IT" sz="1200" b="1" dirty="0">
+                <a:solidFill>
+                  <a:srgbClr val="4A5356"/>
+                </a:solidFill>
+              </a:rPr>
+              <a:t> — </a:t>
+            </a:r>
+            <a:r>
+              <a:rPr lang="it-IT" sz="1200" dirty="0">
                 <a:solidFill>
                   <a:srgbClr val="000000"/>
                 </a:solidFill>
               </a:rPr>
-              <a:t>ne verifica lo stato elencando i container attivi (output PowerShell in basso).</a:t>
-            </a:r>
+              <a:t>ne verifica lo stato elencando i container attivi (output </a:t>
+            </a:r>
+            <a:r>
+              <a:rPr lang="it-IT" sz="1200" dirty="0" err="1">
+                <a:solidFill>
+                  <a:srgbClr val="000000"/>
+                </a:solidFill>
+              </a:rPr>
+              <a:t>PowerShell</a:t>
+            </a:r>
+            <a:r>
+              <a:rPr lang="it-IT" sz="1200" dirty="0">
+                <a:solidFill>
+                  <a:srgbClr val="000000"/>
+                </a:solidFill>
+              </a:rPr>
+              <a:t> in basso).</a:t>
+            </a:r>
+          </a:p>
+        </p:txBody>
+      </p:sp>
+      <p:sp>
+        <p:nvSpPr>
+          <p:cNvPr id="9001" name="Slide Number Placeholder"/>
+          <p:cNvSpPr>
+            <a:spLocks noGrp="1"/>
+          </p:cNvSpPr>
+          <p:nvPr>
+            <p:ph type="sldNum" sz="quarter" idx="12"/>
+          </p:nvPr>
+        </p:nvSpPr>
+        <p:spPr/>
+        <p:txBody>
+          <a:bodyPr/>
+          <a:lstStyle/>
+          <a:p>
+            <a:pPr rtl="0"/>
+            <a:fld id="{5B38B41F-6E66-4D1B-963C-AA5BCA2C9B15}" type="slidenum">
+              <a:rPr lang="it-IT" smtClean="0"/>
+              <a:t>20</a:t>
+            </a:fld>
+            <a:endParaRPr lang="it-IT"/>
           </a:p>
         </p:txBody>
       </p:sp>
@@ -9807,36 +10874,6 @@
           </a:p>
         </p:txBody>
       </p:sp>
-      <p:sp>
-        <p:nvSpPr>
-          <p:cNvPr id="4" name="Date Placeholder 3">
-            <a:extLst>
-              <a:ext uri="{FF2B5EF4-FFF2-40B4-BE49-F238E27FC236}">
-                <a16:creationId xmlns:a16="http://schemas.microsoft.com/office/drawing/2014/main" id="{DD68749D-B5FB-D94F-FC3B-D037D342DD7D}"/>
-              </a:ext>
-            </a:extLst>
-          </p:cNvPr>
-          <p:cNvSpPr>
-            <a:spLocks noGrp="1"/>
-          </p:cNvSpPr>
-          <p:nvPr>
-            <p:ph type="dt" sz="half" idx="10"/>
-          </p:nvPr>
-        </p:nvSpPr>
-        <p:spPr/>
-        <p:txBody>
-          <a:bodyPr/>
-          <a:lstStyle/>
-          <a:p>
-            <a:pPr rtl="0"/>
-            <a:fld id="{925069C4-336E-40F0-85A2-25D6F0A25D32}" type="datetime1">
-              <a:rPr lang="it-IT" smtClean="0"/>
-              <a:t>26/06/2026</a:t>
-            </a:fld>
-            <a:endParaRPr lang="en-US" dirty="0"/>
-          </a:p>
-        </p:txBody>
-      </p:sp>
       <p:pic>
         <p:nvPicPr>
           <p:cNvPr id="10" name="Picture 9">
@@ -9975,6 +11012,30 @@
               </a:rPr>
               <a:t>una console per scrivere ed eseguire query su Elasticsearch e leggerne l'output in formato JSON.</a:t>
             </a:r>
+          </a:p>
+        </p:txBody>
+      </p:sp>
+      <p:sp>
+        <p:nvSpPr>
+          <p:cNvPr id="9001" name="Slide Number Placeholder"/>
+          <p:cNvSpPr>
+            <a:spLocks noGrp="1"/>
+          </p:cNvSpPr>
+          <p:nvPr>
+            <p:ph type="sldNum" sz="quarter" idx="12"/>
+          </p:nvPr>
+        </p:nvSpPr>
+        <p:spPr/>
+        <p:txBody>
+          <a:bodyPr/>
+          <a:lstStyle/>
+          <a:p>
+            <a:pPr rtl="0"/>
+            <a:fld id="{565C3CFA-C391-4ED6-9411-3ACF067151C5}" type="slidenum">
+              <a:rPr lang="it-IT" smtClean="0"/>
+              <a:t>21</a:t>
+            </a:fld>
+            <a:endParaRPr lang="it-IT"/>
           </a:p>
         </p:txBody>
       </p:sp>
@@ -10250,6 +11311,30 @@
           </a:p>
         </p:txBody>
       </p:sp>
+      <p:sp>
+        <p:nvSpPr>
+          <p:cNvPr id="9001" name="Slide Number Placeholder"/>
+          <p:cNvSpPr>
+            <a:spLocks noGrp="1"/>
+          </p:cNvSpPr>
+          <p:nvPr>
+            <p:ph type="sldNum" sz="quarter" idx="12"/>
+          </p:nvPr>
+        </p:nvSpPr>
+        <p:spPr/>
+        <p:txBody>
+          <a:bodyPr/>
+          <a:lstStyle/>
+          <a:p>
+            <a:pPr rtl="0"/>
+            <a:fld id="{7A0D2BF1-CED1-4AC8-9398-4B8117F2A179}" type="slidenum">
+              <a:rPr lang="it-IT" smtClean="0"/>
+              <a:t>22</a:t>
+            </a:fld>
+            <a:endParaRPr lang="it-IT"/>
+          </a:p>
+        </p:txBody>
+      </p:sp>
     </p:spTree>
     <p:extLst>
       <p:ext uri="{BB962C8B-B14F-4D97-AF65-F5344CB8AC3E}">
@@ -10728,18 +11813,12 @@
       </p:sp>
       <p:sp>
         <p:nvSpPr>
-          <p:cNvPr id="4" name="Date Placeholder 3">
-            <a:extLst>
-              <a:ext uri="{FF2B5EF4-FFF2-40B4-BE49-F238E27FC236}">
-                <a16:creationId xmlns:a16="http://schemas.microsoft.com/office/drawing/2014/main" id="{442F80AC-F994-FCA6-F3E5-539FB789E8E8}"/>
-              </a:ext>
-            </a:extLst>
-          </p:cNvPr>
+          <p:cNvPr id="9001" name="Slide Number Placeholder"/>
           <p:cNvSpPr>
             <a:spLocks noGrp="1"/>
           </p:cNvSpPr>
           <p:nvPr>
-            <p:ph type="dt" sz="half" idx="10"/>
+            <p:ph type="sldNum" sz="quarter" idx="12"/>
           </p:nvPr>
         </p:nvSpPr>
         <p:spPr/>
@@ -10748,11 +11827,11 @@
           <a:lstStyle/>
           <a:p>
             <a:pPr rtl="0"/>
-            <a:fld id="{925069C4-336E-40F0-85A2-25D6F0A25D32}" type="datetime1">
+            <a:fld id="{FC2985A9-A749-4DF2-B075-2E2D2D683D3C}" type="slidenum">
               <a:rPr lang="it-IT" smtClean="0"/>
-              <a:t>26/06/2026</a:t>
+              <a:t>3</a:t>
             </a:fld>
-            <a:endParaRPr lang="en-US" dirty="0"/>
+            <a:endParaRPr lang="it-IT"/>
           </a:p>
         </p:txBody>
       </p:sp>
@@ -10893,6 +11972,35 @@
           </a:p>
         </p:txBody>
       </p:sp>
+      <p:sp>
+        <p:nvSpPr>
+          <p:cNvPr id="9001" name="Slide Number Placeholder"/>
+          <p:cNvSpPr>
+            <a:spLocks noGrp="1"/>
+          </p:cNvSpPr>
+          <p:nvPr>
+            <p:ph type="sldNum" sz="quarter" idx="12"/>
+          </p:nvPr>
+        </p:nvSpPr>
+        <p:spPr>
+          <a:xfrm>
+            <a:off x="10993582" y="6640000"/>
+            <a:ext cx="780010" cy="190000"/>
+          </a:xfrm>
+        </p:spPr>
+        <p:txBody>
+          <a:bodyPr vert="horz" lIns="91440" tIns="0" rIns="91440" bIns="0" rtlCol="0" anchor="ctr"/>
+          <a:lstStyle/>
+          <a:p>
+            <a:pPr rtl="0"/>
+            <a:fld id="{E80EF184-354B-4227-9520-D7621CD1CBC6}" type="slidenum">
+              <a:rPr lang="it-IT" smtClean="0"/>
+              <a:t>4</a:t>
+            </a:fld>
+            <a:endParaRPr lang="it-IT"/>
+          </a:p>
+        </p:txBody>
+      </p:sp>
     </p:spTree>
     <p:extLst>
       <p:ext uri="{BB962C8B-B14F-4D97-AF65-F5344CB8AC3E}">
@@ -11279,18 +12387,12 @@
       </p:sp>
       <p:sp>
         <p:nvSpPr>
-          <p:cNvPr id="4" name="Date Placeholder 3">
-            <a:extLst>
-              <a:ext uri="{FF2B5EF4-FFF2-40B4-BE49-F238E27FC236}">
-                <a16:creationId xmlns:a16="http://schemas.microsoft.com/office/drawing/2014/main" id="{442F80AC-F994-FCA6-F3E5-539FB789E8E8}"/>
-              </a:ext>
-            </a:extLst>
-          </p:cNvPr>
+          <p:cNvPr id="9001" name="Slide Number Placeholder"/>
           <p:cNvSpPr>
             <a:spLocks noGrp="1"/>
           </p:cNvSpPr>
           <p:nvPr>
-            <p:ph type="dt" sz="half" idx="10"/>
+            <p:ph type="sldNum" sz="quarter" idx="12"/>
           </p:nvPr>
         </p:nvSpPr>
         <p:spPr/>
@@ -11299,11 +12401,11 @@
           <a:lstStyle/>
           <a:p>
             <a:pPr rtl="0"/>
-            <a:fld id="{925069C4-336E-40F0-85A2-25D6F0A25D32}" type="datetime1">
+            <a:fld id="{65D839CF-79E1-475A-91FE-ADF0ACDEE02E}" type="slidenum">
               <a:rPr lang="it-IT" smtClean="0"/>
-              <a:t>26/06/2026</a:t>
+              <a:t>5</a:t>
             </a:fld>
-            <a:endParaRPr lang="en-US"/>
+            <a:endParaRPr lang="it-IT"/>
           </a:p>
         </p:txBody>
       </p:sp>
@@ -11450,6 +12552,30 @@
           </a:p>
         </p:txBody>
       </p:sp>
+      <p:sp>
+        <p:nvSpPr>
+          <p:cNvPr id="9001" name="Slide Number Placeholder"/>
+          <p:cNvSpPr>
+            <a:spLocks noGrp="1"/>
+          </p:cNvSpPr>
+          <p:nvPr>
+            <p:ph type="sldNum" sz="quarter" idx="12"/>
+          </p:nvPr>
+        </p:nvSpPr>
+        <p:spPr/>
+        <p:txBody>
+          <a:bodyPr/>
+          <a:lstStyle/>
+          <a:p>
+            <a:pPr rtl="0"/>
+            <a:fld id="{4A853F48-C6DA-4DAC-B55C-F6918F04E7D2}" type="slidenum">
+              <a:rPr lang="it-IT" smtClean="0"/>
+              <a:t>6</a:t>
+            </a:fld>
+            <a:endParaRPr lang="it-IT"/>
+          </a:p>
+        </p:txBody>
+      </p:sp>
     </p:spTree>
     <p:extLst>
       <p:ext uri="{BB962C8B-B14F-4D97-AF65-F5344CB8AC3E}">
@@ -11811,6 +12937,30 @@
           </a:p>
         </p:txBody>
       </p:sp>
+      <p:sp>
+        <p:nvSpPr>
+          <p:cNvPr id="9001" name="Slide Number Placeholder"/>
+          <p:cNvSpPr>
+            <a:spLocks noGrp="1"/>
+          </p:cNvSpPr>
+          <p:nvPr>
+            <p:ph type="sldNum" sz="quarter" idx="12"/>
+          </p:nvPr>
+        </p:nvSpPr>
+        <p:spPr/>
+        <p:txBody>
+          <a:bodyPr/>
+          <a:lstStyle/>
+          <a:p>
+            <a:pPr rtl="0"/>
+            <a:fld id="{CFA84B36-DEDC-4CCB-A38B-75CCBADBD86E}" type="slidenum">
+              <a:rPr lang="it-IT" smtClean="0"/>
+              <a:t>7</a:t>
+            </a:fld>
+            <a:endParaRPr lang="it-IT"/>
+          </a:p>
+        </p:txBody>
+      </p:sp>
     </p:spTree>
     <p:extLst>
       <p:ext uri="{BB962C8B-B14F-4D97-AF65-F5344CB8AC3E}">
@@ -11902,36 +13052,6 @@
           </a:prstGeom>
         </p:spPr>
       </p:pic>
-      <p:sp>
-        <p:nvSpPr>
-          <p:cNvPr id="4" name="Date Placeholder 3">
-            <a:extLst>
-              <a:ext uri="{FF2B5EF4-FFF2-40B4-BE49-F238E27FC236}">
-                <a16:creationId xmlns:a16="http://schemas.microsoft.com/office/drawing/2014/main" id="{FF042D96-D789-1625-8D76-A8FC77C82989}"/>
-              </a:ext>
-            </a:extLst>
-          </p:cNvPr>
-          <p:cNvSpPr>
-            <a:spLocks noGrp="1"/>
-          </p:cNvSpPr>
-          <p:nvPr>
-            <p:ph type="dt" sz="half" idx="10"/>
-          </p:nvPr>
-        </p:nvSpPr>
-        <p:spPr/>
-        <p:txBody>
-          <a:bodyPr/>
-          <a:lstStyle/>
-          <a:p>
-            <a:pPr rtl="0"/>
-            <a:fld id="{925069C4-336E-40F0-85A2-25D6F0A25D32}" type="datetime1">
-              <a:rPr lang="it-IT" smtClean="0"/>
-              <a:t>26/06/2026</a:t>
-            </a:fld>
-            <a:endParaRPr lang="en-US" dirty="0"/>
-          </a:p>
-        </p:txBody>
-      </p:sp>
       <p:pic>
         <p:nvPicPr>
           <p:cNvPr id="8" name="Picture 7">
@@ -12124,6 +13244,30 @@
               </a:rPr>
               <a:t>Numero di acquisti effettuati per ciascuna collana</a:t>
             </a:r>
+          </a:p>
+        </p:txBody>
+      </p:sp>
+      <p:sp>
+        <p:nvSpPr>
+          <p:cNvPr id="9001" name="Slide Number Placeholder"/>
+          <p:cNvSpPr>
+            <a:spLocks noGrp="1"/>
+          </p:cNvSpPr>
+          <p:nvPr>
+            <p:ph type="sldNum" sz="quarter" idx="12"/>
+          </p:nvPr>
+        </p:nvSpPr>
+        <p:spPr/>
+        <p:txBody>
+          <a:bodyPr/>
+          <a:lstStyle/>
+          <a:p>
+            <a:pPr rtl="0"/>
+            <a:fld id="{09D77F64-0A85-41A7-8F87-3A4A78141F22}" type="slidenum">
+              <a:rPr lang="it-IT" smtClean="0"/>
+              <a:t>8</a:t>
+            </a:fld>
+            <a:endParaRPr lang="it-IT"/>
           </a:p>
         </p:txBody>
       </p:sp>
@@ -12223,36 +13367,6 @@
           </a:prstGeom>
         </p:spPr>
       </p:pic>
-      <p:sp>
-        <p:nvSpPr>
-          <p:cNvPr id="4" name="Date Placeholder 3">
-            <a:extLst>
-              <a:ext uri="{FF2B5EF4-FFF2-40B4-BE49-F238E27FC236}">
-                <a16:creationId xmlns:a16="http://schemas.microsoft.com/office/drawing/2014/main" id="{25B7C682-CB3A-6B0A-95E6-AD706BF1EED4}"/>
-              </a:ext>
-            </a:extLst>
-          </p:cNvPr>
-          <p:cNvSpPr>
-            <a:spLocks noGrp="1"/>
-          </p:cNvSpPr>
-          <p:nvPr>
-            <p:ph type="dt" sz="half" idx="10"/>
-          </p:nvPr>
-        </p:nvSpPr>
-        <p:spPr/>
-        <p:txBody>
-          <a:bodyPr/>
-          <a:lstStyle/>
-          <a:p>
-            <a:pPr rtl="0"/>
-            <a:fld id="{925069C4-336E-40F0-85A2-25D6F0A25D32}" type="datetime1">
-              <a:rPr lang="it-IT" smtClean="0"/>
-              <a:t>26/06/2026</a:t>
-            </a:fld>
-            <a:endParaRPr lang="en-US"/>
-          </a:p>
-        </p:txBody>
-      </p:sp>
       <p:pic>
         <p:nvPicPr>
           <p:cNvPr id="8" name="Picture 7">
@@ -12402,6 +13516,30 @@
               </a:rPr>
               <a:t>setup.py e queries.py risiedono nella cartella relazionale/python.</a:t>
             </a:r>
+          </a:p>
+        </p:txBody>
+      </p:sp>
+      <p:sp>
+        <p:nvSpPr>
+          <p:cNvPr id="9001" name="Slide Number Placeholder"/>
+          <p:cNvSpPr>
+            <a:spLocks noGrp="1"/>
+          </p:cNvSpPr>
+          <p:nvPr>
+            <p:ph type="sldNum" sz="quarter" idx="12"/>
+          </p:nvPr>
+        </p:nvSpPr>
+        <p:spPr/>
+        <p:txBody>
+          <a:bodyPr/>
+          <a:lstStyle/>
+          <a:p>
+            <a:pPr rtl="0"/>
+            <a:fld id="{D7C0AE5C-F5B5-44EA-BF30-7B512CB15EEA}" type="slidenum">
+              <a:rPr lang="it-IT" smtClean="0"/>
+              <a:t>9</a:t>
+            </a:fld>
+            <a:endParaRPr lang="it-IT"/>
           </a:p>
         </p:txBody>
       </p:sp>
